--- a/courseware/202609_DSA_MOOC_Quiz_CH03-04.pptx
+++ b/courseware/202609_DSA_MOOC_Quiz_CH03-04.pptx
@@ -15130,7 +15130,7 @@
                 <a:ea typeface="Microsoft YaHei" pitchFamily="34" charset="-122"/>
                 <a:cs typeface="Microsoft YaHei" pitchFamily="34" charset="-120"/>
               </a:rPr>
-              <a:t>利用给定的字母映射表进行加密（映射表见原题）。若 "encrypt" 被加密为 "tkzwsdf"，则 "algorithm" 被加密为：</a:t>
+              <a:t>利用下面给定的字母映射表进行加密（上行明文，下行密文）。若 "encrypt" 被加密为 "tkzwsdf"，则 "algorithm" 被加密为：</a:t>
             </a:r>
             <a:endParaRPr lang="en-US" sz="2000" dirty="0"/>
           </a:p>
@@ -15138,7 +15138,91 @@
       </p:sp>
       <p:sp>
         <p:nvSpPr>
-          <p:cNvPr id="7" name="ANS_175"/>
+          <p:cNvPr id="7" name="Shape 5"/>
+          <p:cNvSpPr/>
+          <p:nvPr/>
+        </p:nvSpPr>
+        <p:spPr>
+          <a:xfrm>
+            <a:off x="548640" y="2962656"/>
+            <a:ext cx="6309360" cy="773180"/>
+          </a:xfrm>
+          <a:prstGeom prst="roundRect">
+            <a:avLst>
+              <a:gd name="adj" fmla="val 9461"/>
+            </a:avLst>
+          </a:prstGeom>
+          <a:solidFill>
+            <a:srgbClr val="F1F4F2"/>
+          </a:solidFill>
+          <a:ln/>
+        </p:spPr>
+      </p:sp>
+      <p:sp>
+        <p:nvSpPr>
+          <p:cNvPr id="8" name="Text 6"/>
+          <p:cNvSpPr txBox="1"/>
+          <p:nvPr/>
+        </p:nvSpPr>
+        <p:spPr>
+          <a:xfrm>
+            <a:off x="731520" y="2962656"/>
+            <a:ext cx="6035040" cy="773180"/>
+          </a:xfrm>
+          <a:prstGeom prst="rect">
+            <a:avLst/>
+          </a:prstGeom>
+          <a:noFill/>
+          <a:ln/>
+        </p:spPr>
+        <p:txBody>
+          <a:bodyPr wrap="square" lIns="0" tIns="0" rIns="0" bIns="0" rtlCol="0" anchor="ctr"/>
+          <a:lstStyle/>
+          <a:p>
+            <a:pPr indent="0" marL="0">
+              <a:lnSpc>
+                <a:spcPct val="100000"/>
+              </a:lnSpc>
+              <a:buNone/>
+            </a:pPr>
+            <a:r>
+              <a:rPr lang="en-US" sz="1488" dirty="0">
+                <a:solidFill>
+                  <a:srgbClr val="1B2B24"/>
+                </a:solidFill>
+                <a:latin typeface="Courier New" pitchFamily="34" charset="0"/>
+                <a:ea typeface="Courier New" pitchFamily="34" charset="-122"/>
+                <a:cs typeface="Courier New" pitchFamily="34" charset="-120"/>
+              </a:rPr>
+              <a:t>a b c d e f g h i j k l m n o p q r s t u v w x y z</a:t>
+            </a:r>
+            <a:endParaRPr lang="en-US" sz="1488" dirty="0"/>
+          </a:p>
+          <a:p>
+            <a:pPr indent="0" marL="0">
+              <a:lnSpc>
+                <a:spcPct val="100000"/>
+              </a:lnSpc>
+              <a:buNone/>
+            </a:pPr>
+            <a:r>
+              <a:rPr lang="en-US" sz="1488" dirty="0">
+                <a:solidFill>
+                  <a:srgbClr val="1B2B24"/>
+                </a:solidFill>
+                <a:latin typeface="Courier New" pitchFamily="34" charset="0"/>
+                <a:ea typeface="Courier New" pitchFamily="34" charset="-122"/>
+                <a:cs typeface="Courier New" pitchFamily="34" charset="-120"/>
+              </a:rPr>
+              <a:t>n g z q t c o b m u h e l k p d a w x f y i v r s j</a:t>
+            </a:r>
+            <a:endParaRPr lang="en-US" sz="1488" dirty="0"/>
+          </a:p>
+        </p:txBody>
+      </p:sp>
+      <p:sp>
+        <p:nvSpPr>
+          <p:cNvPr id="9" name="ANS_175"/>
           <p:cNvSpPr/>
           <p:nvPr/>
         </p:nvSpPr>
@@ -15165,7 +15249,7 @@
       </p:sp>
       <p:sp>
         <p:nvSpPr>
-          <p:cNvPr id="8" name="ANS_176"/>
+          <p:cNvPr id="10" name="ANS_176"/>
           <p:cNvSpPr txBox="1"/>
           <p:nvPr/>
         </p:nvSpPr>
@@ -15204,7 +15288,7 @@
       </p:sp>
       <p:sp>
         <p:nvSpPr>
-          <p:cNvPr id="9" name="ANS_177"/>
+          <p:cNvPr id="11" name="ANS_177"/>
           <p:cNvSpPr txBox="1"/>
           <p:nvPr/>
         </p:nvSpPr>
@@ -15243,7 +15327,7 @@
       </p:sp>
       <p:sp>
         <p:nvSpPr>
-          <p:cNvPr id="10" name="ANS_178"/>
+          <p:cNvPr id="12" name="ANS_178"/>
           <p:cNvSpPr txBox="1"/>
           <p:nvPr/>
         </p:nvSpPr>
@@ -15282,7 +15366,7 @@
       </p:sp>
       <p:sp>
         <p:nvSpPr>
-          <p:cNvPr id="11" name="ANS_179"/>
+          <p:cNvPr id="13" name="ANS_179"/>
           <p:cNvSpPr/>
           <p:nvPr/>
         </p:nvSpPr>
@@ -15302,14 +15386,14 @@
       </p:sp>
       <p:sp>
         <p:nvSpPr>
-          <p:cNvPr id="12" name="ANS_180"/>
+          <p:cNvPr id="14" name="ANS_180"/>
           <p:cNvSpPr txBox="1"/>
           <p:nvPr/>
         </p:nvSpPr>
         <p:spPr>
           <a:xfrm>
             <a:off x="7818120" y="2651760"/>
-            <a:ext cx="3520440" cy="624840"/>
+            <a:ext cx="3520440" cy="339852"/>
           </a:xfrm>
           <a:prstGeom prst="rect">
             <a:avLst/>
@@ -15333,7 +15417,7 @@
                 <a:ea typeface="Microsoft YaHei" pitchFamily="34" charset="-122"/>
                 <a:cs typeface="Microsoft YaHei" pitchFamily="34" charset="-120"/>
               </a:rPr>
-              <a:t>由已知一对可读出：e→t, n→k, c→z, r→w, y→s, p→d, t→f</a:t>
+              <a:t>逐字母查表替换。</a:t>
             </a:r>
             <a:endParaRPr lang="en-US" sz="1700" dirty="0"/>
           </a:p>
@@ -15341,13 +15425,13 @@
       </p:sp>
       <p:sp>
         <p:nvSpPr>
-          <p:cNvPr id="13" name="ANS_181"/>
+          <p:cNvPr id="15" name="ANS_181"/>
           <p:cNvSpPr/>
           <p:nvPr/>
         </p:nvSpPr>
         <p:spPr>
           <a:xfrm>
-            <a:off x="7616952" y="3513277"/>
+            <a:off x="7616952" y="3228289"/>
             <a:ext cx="91440" cy="91440"/>
           </a:xfrm>
           <a:prstGeom prst="ellipse">
@@ -15361,14 +15445,14 @@
       </p:sp>
       <p:sp>
         <p:nvSpPr>
-          <p:cNvPr id="14" name="ANS_182"/>
-          <p:cNvSpPr txBox="1"/>
-          <p:nvPr/>
-        </p:nvSpPr>
-        <p:spPr>
-          <a:xfrm>
-            <a:off x="7818120" y="3416503"/>
-            <a:ext cx="3520440" cy="624840"/>
+          <p:cNvPr id="16" name="ANS_182"/>
+          <p:cNvSpPr txBox="1"/>
+          <p:nvPr/>
+        </p:nvSpPr>
+        <p:spPr>
+          <a:xfrm>
+            <a:off x="7818120" y="3131515"/>
+            <a:ext cx="3520440" cy="909828"/>
           </a:xfrm>
           <a:prstGeom prst="rect">
             <a:avLst/>
@@ -15392,7 +15476,7 @@
                 <a:ea typeface="Microsoft YaHei" pitchFamily="34" charset="-122"/>
                 <a:cs typeface="Microsoft YaHei" pitchFamily="34" charset="-120"/>
               </a:rPr>
-              <a:t>其余字母查映射表：a→n, l→e, g→o, o→p, i→m, h→b, m→l</a:t>
+              <a:t>验证：e→t, n→k, c→z, r→w, y→s, p→d, t→f，即 encrypt → tkzwsdf</a:t>
             </a:r>
             <a:endParaRPr lang="en-US" sz="1700" dirty="0"/>
           </a:p>
@@ -15400,7 +15484,7 @@
       </p:sp>
       <p:sp>
         <p:nvSpPr>
-          <p:cNvPr id="15" name="ANS_183"/>
+          <p:cNvPr id="17" name="ANS_183"/>
           <p:cNvSpPr/>
           <p:nvPr/>
         </p:nvSpPr>
@@ -15420,7 +15504,7 @@
       </p:sp>
       <p:sp>
         <p:nvSpPr>
-          <p:cNvPr id="16" name="ANS_184"/>
+          <p:cNvPr id="18" name="ANS_184"/>
           <p:cNvSpPr txBox="1"/>
           <p:nvPr/>
         </p:nvSpPr>
@@ -15451,7 +15535,66 @@
                 <a:ea typeface="Microsoft YaHei" pitchFamily="34" charset="-122"/>
                 <a:cs typeface="Microsoft YaHei" pitchFamily="34" charset="-120"/>
               </a:rPr>
-              <a:t>algorithm → neopwmfbl（其中 r→w、t→f 与上面一致）</a:t>
+              <a:t>a→n, l→e, g→o, o→p, r→w, i→m, t→f, h→b, m→l</a:t>
+            </a:r>
+            <a:endParaRPr lang="en-US" sz="1700" dirty="0"/>
+          </a:p>
+        </p:txBody>
+      </p:sp>
+      <p:sp>
+        <p:nvSpPr>
+          <p:cNvPr id="19" name="ANS_185"/>
+          <p:cNvSpPr/>
+          <p:nvPr/>
+        </p:nvSpPr>
+        <p:spPr>
+          <a:xfrm>
+            <a:off x="7616952" y="5042764"/>
+            <a:ext cx="91440" cy="91440"/>
+          </a:xfrm>
+          <a:prstGeom prst="ellipse">
+            <a:avLst/>
+          </a:prstGeom>
+          <a:solidFill>
+            <a:srgbClr val="F2B134"/>
+          </a:solidFill>
+          <a:ln/>
+        </p:spPr>
+      </p:sp>
+      <p:sp>
+        <p:nvSpPr>
+          <p:cNvPr id="20" name="ANS_186"/>
+          <p:cNvSpPr txBox="1"/>
+          <p:nvPr/>
+        </p:nvSpPr>
+        <p:spPr>
+          <a:xfrm>
+            <a:off x="7818120" y="4945990"/>
+            <a:ext cx="3520440" cy="339852"/>
+          </a:xfrm>
+          <a:prstGeom prst="rect">
+            <a:avLst/>
+          </a:prstGeom>
+          <a:noFill/>
+          <a:ln/>
+        </p:spPr>
+        <p:txBody>
+          <a:bodyPr wrap="square" lIns="0" tIns="0" rIns="0" bIns="0" rtlCol="0" anchor="t"/>
+          <a:lstStyle/>
+          <a:p>
+            <a:pPr algn="l" indent="0" marL="0">
+              <a:buNone/>
+            </a:pPr>
+            <a:r>
+              <a:rPr lang="en-US" sz="1700" dirty="0">
+                <a:solidFill>
+                  <a:srgbClr val="2B2B2B"/>
+                </a:solidFill>
+                <a:latin typeface="Microsoft YaHei" pitchFamily="34" charset="0"/>
+                <a:ea typeface="Microsoft YaHei" pitchFamily="34" charset="-122"/>
+                <a:cs typeface="Microsoft YaHei" pitchFamily="34" charset="-120"/>
+              </a:rPr>
+              <a:t>algorithm → neopwmfbl</a:t>
             </a:r>
             <a:endParaRPr lang="en-US" sz="1700" dirty="0"/>
           </a:p>
@@ -15496,7 +15639,7 @@
                                           </p:stCondLst>
                                         </p:cTn>
                                         <p:tgtEl>
-                                          <p:spTgt spid="7"/>
+                                          <p:spTgt spid="9"/>
                                         </p:tgtEl>
                                         <p:attrNameLst>
                                           <p:attrName>style.visibility</p:attrName>
@@ -15510,7 +15653,7 @@
                                       <p:cBhvr>
                                         <p:cTn id="7" dur="400"/>
                                         <p:tgtEl>
-                                          <p:spTgt spid="7"/>
+                                          <p:spTgt spid="9"/>
                                         </p:tgtEl>
                                       </p:cBhvr>
                                     </p:animEffect>
@@ -15531,7 +15674,7 @@
                                           </p:stCondLst>
                                         </p:cTn>
                                         <p:tgtEl>
-                                          <p:spTgt spid="8"/>
+                                          <p:spTgt spid="10"/>
                                         </p:tgtEl>
                                         <p:attrNameLst>
                                           <p:attrName>style.visibility</p:attrName>
@@ -15545,7 +15688,7 @@
                                       <p:cBhvr>
                                         <p:cTn id="10" dur="400"/>
                                         <p:tgtEl>
-                                          <p:spTgt spid="8"/>
+                                          <p:spTgt spid="10"/>
                                         </p:tgtEl>
                                       </p:cBhvr>
                                     </p:animEffect>
@@ -15566,7 +15709,7 @@
                                           </p:stCondLst>
                                         </p:cTn>
                                         <p:tgtEl>
-                                          <p:spTgt spid="9"/>
+                                          <p:spTgt spid="11"/>
                                         </p:tgtEl>
                                         <p:attrNameLst>
                                           <p:attrName>style.visibility</p:attrName>
@@ -15580,7 +15723,7 @@
                                       <p:cBhvr>
                                         <p:cTn id="13" dur="400"/>
                                         <p:tgtEl>
-                                          <p:spTgt spid="9"/>
+                                          <p:spTgt spid="11"/>
                                         </p:tgtEl>
                                       </p:cBhvr>
                                     </p:animEffect>
@@ -15601,7 +15744,7 @@
                                           </p:stCondLst>
                                         </p:cTn>
                                         <p:tgtEl>
-                                          <p:spTgt spid="10"/>
+                                          <p:spTgt spid="12"/>
                                         </p:tgtEl>
                                         <p:attrNameLst>
                                           <p:attrName>style.visibility</p:attrName>
@@ -15615,7 +15758,7 @@
                                       <p:cBhvr>
                                         <p:cTn id="16" dur="400"/>
                                         <p:tgtEl>
-                                          <p:spTgt spid="10"/>
+                                          <p:spTgt spid="12"/>
                                         </p:tgtEl>
                                       </p:cBhvr>
                                     </p:animEffect>
@@ -15636,7 +15779,7 @@
                                           </p:stCondLst>
                                         </p:cTn>
                                         <p:tgtEl>
-                                          <p:spTgt spid="11"/>
+                                          <p:spTgt spid="13"/>
                                         </p:tgtEl>
                                         <p:attrNameLst>
                                           <p:attrName>style.visibility</p:attrName>
@@ -15650,7 +15793,7 @@
                                       <p:cBhvr>
                                         <p:cTn id="19" dur="400"/>
                                         <p:tgtEl>
-                                          <p:spTgt spid="11"/>
+                                          <p:spTgt spid="13"/>
                                         </p:tgtEl>
                                       </p:cBhvr>
                                     </p:animEffect>
@@ -15671,7 +15814,7 @@
                                           </p:stCondLst>
                                         </p:cTn>
                                         <p:tgtEl>
-                                          <p:spTgt spid="12"/>
+                                          <p:spTgt spid="14"/>
                                         </p:tgtEl>
                                         <p:attrNameLst>
                                           <p:attrName>style.visibility</p:attrName>
@@ -15685,7 +15828,7 @@
                                       <p:cBhvr>
                                         <p:cTn id="22" dur="400"/>
                                         <p:tgtEl>
-                                          <p:spTgt spid="12"/>
+                                          <p:spTgt spid="14"/>
                                         </p:tgtEl>
                                       </p:cBhvr>
                                     </p:animEffect>
@@ -15706,7 +15849,7 @@
                                           </p:stCondLst>
                                         </p:cTn>
                                         <p:tgtEl>
-                                          <p:spTgt spid="13"/>
+                                          <p:spTgt spid="15"/>
                                         </p:tgtEl>
                                         <p:attrNameLst>
                                           <p:attrName>style.visibility</p:attrName>
@@ -15720,7 +15863,7 @@
                                       <p:cBhvr>
                                         <p:cTn id="25" dur="400"/>
                                         <p:tgtEl>
-                                          <p:spTgt spid="13"/>
+                                          <p:spTgt spid="15"/>
                                         </p:tgtEl>
                                       </p:cBhvr>
                                     </p:animEffect>
@@ -15741,7 +15884,7 @@
                                           </p:stCondLst>
                                         </p:cTn>
                                         <p:tgtEl>
-                                          <p:spTgt spid="14"/>
+                                          <p:spTgt spid="16"/>
                                         </p:tgtEl>
                                         <p:attrNameLst>
                                           <p:attrName>style.visibility</p:attrName>
@@ -15755,7 +15898,7 @@
                                       <p:cBhvr>
                                         <p:cTn id="28" dur="400"/>
                                         <p:tgtEl>
-                                          <p:spTgt spid="14"/>
+                                          <p:spTgt spid="16"/>
                                         </p:tgtEl>
                                       </p:cBhvr>
                                     </p:animEffect>
@@ -15776,7 +15919,7 @@
                                           </p:stCondLst>
                                         </p:cTn>
                                         <p:tgtEl>
-                                          <p:spTgt spid="15"/>
+                                          <p:spTgt spid="17"/>
                                         </p:tgtEl>
                                         <p:attrNameLst>
                                           <p:attrName>style.visibility</p:attrName>
@@ -15790,7 +15933,7 @@
                                       <p:cBhvr>
                                         <p:cTn id="31" dur="400"/>
                                         <p:tgtEl>
-                                          <p:spTgt spid="15"/>
+                                          <p:spTgt spid="17"/>
                                         </p:tgtEl>
                                       </p:cBhvr>
                                     </p:animEffect>
@@ -15811,7 +15954,7 @@
                                           </p:stCondLst>
                                         </p:cTn>
                                         <p:tgtEl>
-                                          <p:spTgt spid="16"/>
+                                          <p:spTgt spid="18"/>
                                         </p:tgtEl>
                                         <p:attrNameLst>
                                           <p:attrName>style.visibility</p:attrName>
@@ -15825,7 +15968,77 @@
                                       <p:cBhvr>
                                         <p:cTn id="34" dur="400"/>
                                         <p:tgtEl>
-                                          <p:spTgt spid="16"/>
+                                          <p:spTgt spid="18"/>
+                                        </p:tgtEl>
+                                      </p:cBhvr>
+                                    </p:animEffect>
+                                  </p:childTnLst>
+                                </p:cTn>
+                              </p:par>
+                              <p:par>
+                                <p:cTn id="35" presetID="10" presetClass="entr" presetSubtype="0" fill="hold" grpId="0" nodeType="withEffect">
+                                  <p:stCondLst>
+                                    <p:cond delay="0"/>
+                                  </p:stCondLst>
+                                  <p:childTnLst>
+                                    <p:set>
+                                      <p:cBhvr>
+                                        <p:cTn id="36" dur="1" fill="hold">
+                                          <p:stCondLst>
+                                            <p:cond delay="0"/>
+                                          </p:stCondLst>
+                                        </p:cTn>
+                                        <p:tgtEl>
+                                          <p:spTgt spid="19"/>
+                                        </p:tgtEl>
+                                        <p:attrNameLst>
+                                          <p:attrName>style.visibility</p:attrName>
+                                        </p:attrNameLst>
+                                      </p:cBhvr>
+                                      <p:to>
+                                        <p:strVal val="visible"/>
+                                      </p:to>
+                                    </p:set>
+                                    <p:animEffect transition="in" filter="fade">
+                                      <p:cBhvr>
+                                        <p:cTn id="37" dur="400"/>
+                                        <p:tgtEl>
+                                          <p:spTgt spid="19"/>
+                                        </p:tgtEl>
+                                      </p:cBhvr>
+                                    </p:animEffect>
+                                  </p:childTnLst>
+                                </p:cTn>
+                              </p:par>
+                              <p:par>
+                                <p:cTn id="38" presetID="10" presetClass="entr" presetSubtype="0" fill="hold" grpId="0" nodeType="withEffect">
+                                  <p:stCondLst>
+                                    <p:cond delay="0"/>
+                                  </p:stCondLst>
+                                  <p:childTnLst>
+                                    <p:set>
+                                      <p:cBhvr>
+                                        <p:cTn id="39" dur="1" fill="hold">
+                                          <p:stCondLst>
+                                            <p:cond delay="0"/>
+                                          </p:stCondLst>
+                                        </p:cTn>
+                                        <p:tgtEl>
+                                          <p:spTgt spid="20"/>
+                                        </p:tgtEl>
+                                        <p:attrNameLst>
+                                          <p:attrName>style.visibility</p:attrName>
+                                        </p:attrNameLst>
+                                      </p:cBhvr>
+                                      <p:to>
+                                        <p:strVal val="visible"/>
+                                      </p:to>
+                                    </p:set>
+                                    <p:animEffect transition="in" filter="fade">
+                                      <p:cBhvr>
+                                        <p:cTn id="40" dur="400"/>
+                                        <p:tgtEl>
+                                          <p:spTgt spid="20"/>
                                         </p:tgtEl>
                                       </p:cBhvr>
                                     </p:animEffect>
@@ -15860,8 +16073,6 @@
       </p:par>
     </p:tnLst>
     <p:bldLst>
-      <p:bldP spid="7" grpId="0" animBg="1"/>
-      <p:bldP spid="8" grpId="0" animBg="1"/>
       <p:bldP spid="9" grpId="0" animBg="1"/>
       <p:bldP spid="10" grpId="0" animBg="1"/>
       <p:bldP spid="11" grpId="0" animBg="1"/>
@@ -15870,6 +16081,10 @@
       <p:bldP spid="14" grpId="0" animBg="1"/>
       <p:bldP spid="15" grpId="0" animBg="1"/>
       <p:bldP spid="16" grpId="0" animBg="1"/>
+      <p:bldP spid="17" grpId="0" animBg="1"/>
+      <p:bldP spid="18" grpId="0" animBg="1"/>
+      <p:bldP spid="19" grpId="0" animBg="1"/>
+      <p:bldP spid="20" grpId="0" animBg="1"/>
     </p:bldLst>
   </p:timing>
 </p:sld>
@@ -16374,7 +16589,7 @@
       </p:sp>
       <p:sp>
         <p:nvSpPr>
-          <p:cNvPr id="9" name="ANS_185"/>
+          <p:cNvPr id="9" name="ANS_187"/>
           <p:cNvSpPr/>
           <p:nvPr/>
         </p:nvSpPr>
@@ -16401,7 +16616,7 @@
       </p:sp>
       <p:sp>
         <p:nvSpPr>
-          <p:cNvPr id="10" name="ANS_186"/>
+          <p:cNvPr id="10" name="ANS_188"/>
           <p:cNvSpPr txBox="1"/>
           <p:nvPr/>
         </p:nvSpPr>
@@ -16440,7 +16655,7 @@
       </p:sp>
       <p:sp>
         <p:nvSpPr>
-          <p:cNvPr id="11" name="ANS_187"/>
+          <p:cNvPr id="11" name="ANS_189"/>
           <p:cNvSpPr txBox="1"/>
           <p:nvPr/>
         </p:nvSpPr>
@@ -16479,7 +16694,7 @@
       </p:sp>
       <p:sp>
         <p:nvSpPr>
-          <p:cNvPr id="12" name="ANS_188"/>
+          <p:cNvPr id="12" name="ANS_190"/>
           <p:cNvSpPr txBox="1"/>
           <p:nvPr/>
         </p:nvSpPr>
@@ -16518,7 +16733,7 @@
       </p:sp>
       <p:sp>
         <p:nvSpPr>
-          <p:cNvPr id="13" name="ANS_189"/>
+          <p:cNvPr id="13" name="ANS_191"/>
           <p:cNvSpPr/>
           <p:nvPr/>
         </p:nvSpPr>
@@ -16538,7 +16753,7 @@
       </p:sp>
       <p:sp>
         <p:nvSpPr>
-          <p:cNvPr id="14" name="ANS_190"/>
+          <p:cNvPr id="14" name="ANS_192"/>
           <p:cNvSpPr txBox="1"/>
           <p:nvPr/>
         </p:nvSpPr>
@@ -16577,7 +16792,7 @@
       </p:sp>
       <p:sp>
         <p:nvSpPr>
-          <p:cNvPr id="15" name="ANS_191"/>
+          <p:cNvPr id="15" name="ANS_193"/>
           <p:cNvSpPr/>
           <p:nvPr/>
         </p:nvSpPr>
@@ -16597,7 +16812,7 @@
       </p:sp>
       <p:sp>
         <p:nvSpPr>
-          <p:cNvPr id="16" name="ANS_192"/>
+          <p:cNvPr id="16" name="ANS_194"/>
           <p:cNvSpPr txBox="1"/>
           <p:nvPr/>
         </p:nvSpPr>
@@ -16636,7 +16851,7 @@
       </p:sp>
       <p:sp>
         <p:nvSpPr>
-          <p:cNvPr id="17" name="ANS_193"/>
+          <p:cNvPr id="17" name="ANS_195"/>
           <p:cNvSpPr/>
           <p:nvPr/>
         </p:nvSpPr>
@@ -16656,7 +16871,7 @@
       </p:sp>
       <p:sp>
         <p:nvSpPr>
-          <p:cNvPr id="18" name="ANS_194"/>
+          <p:cNvPr id="18" name="ANS_196"/>
           <p:cNvSpPr txBox="1"/>
           <p:nvPr/>
         </p:nvSpPr>
@@ -17313,7 +17528,7 @@
       </p:sp>
       <p:sp>
         <p:nvSpPr>
-          <p:cNvPr id="7" name="ANS_195"/>
+          <p:cNvPr id="7" name="ANS_197"/>
           <p:cNvSpPr/>
           <p:nvPr/>
         </p:nvSpPr>
@@ -17340,7 +17555,7 @@
       </p:sp>
       <p:sp>
         <p:nvSpPr>
-          <p:cNvPr id="8" name="ANS_196"/>
+          <p:cNvPr id="8" name="ANS_198"/>
           <p:cNvSpPr txBox="1"/>
           <p:nvPr/>
         </p:nvSpPr>
@@ -17379,7 +17594,7 @@
       </p:sp>
       <p:sp>
         <p:nvSpPr>
-          <p:cNvPr id="9" name="ANS_197"/>
+          <p:cNvPr id="9" name="ANS_199"/>
           <p:cNvSpPr txBox="1"/>
           <p:nvPr/>
         </p:nvSpPr>
@@ -17418,7 +17633,7 @@
       </p:sp>
       <p:sp>
         <p:nvSpPr>
-          <p:cNvPr id="10" name="ANS_198"/>
+          <p:cNvPr id="10" name="ANS_200"/>
           <p:cNvSpPr txBox="1"/>
           <p:nvPr/>
         </p:nvSpPr>
@@ -17457,7 +17672,7 @@
       </p:sp>
       <p:sp>
         <p:nvSpPr>
-          <p:cNvPr id="11" name="ANS_199"/>
+          <p:cNvPr id="11" name="ANS_201"/>
           <p:cNvSpPr/>
           <p:nvPr/>
         </p:nvSpPr>
@@ -17477,7 +17692,7 @@
       </p:sp>
       <p:sp>
         <p:nvSpPr>
-          <p:cNvPr id="12" name="ANS_200"/>
+          <p:cNvPr id="12" name="ANS_202"/>
           <p:cNvSpPr txBox="1"/>
           <p:nvPr/>
         </p:nvSpPr>
@@ -17516,7 +17731,7 @@
       </p:sp>
       <p:sp>
         <p:nvSpPr>
-          <p:cNvPr id="13" name="ANS_201"/>
+          <p:cNvPr id="13" name="ANS_203"/>
           <p:cNvSpPr/>
           <p:nvPr/>
         </p:nvSpPr>
@@ -17536,7 +17751,7 @@
       </p:sp>
       <p:sp>
         <p:nvSpPr>
-          <p:cNvPr id="14" name="ANS_202"/>
+          <p:cNvPr id="14" name="ANS_204"/>
           <p:cNvSpPr txBox="1"/>
           <p:nvPr/>
         </p:nvSpPr>
@@ -18121,7 +18336,7 @@
       </p:sp>
       <p:sp>
         <p:nvSpPr>
-          <p:cNvPr id="7" name="ANS_203"/>
+          <p:cNvPr id="7" name="ANS_205"/>
           <p:cNvSpPr/>
           <p:nvPr/>
         </p:nvSpPr>
@@ -18148,7 +18363,7 @@
       </p:sp>
       <p:sp>
         <p:nvSpPr>
-          <p:cNvPr id="8" name="ANS_204"/>
+          <p:cNvPr id="8" name="ANS_206"/>
           <p:cNvSpPr txBox="1"/>
           <p:nvPr/>
         </p:nvSpPr>
@@ -18187,7 +18402,7 @@
       </p:sp>
       <p:sp>
         <p:nvSpPr>
-          <p:cNvPr id="9" name="ANS_205"/>
+          <p:cNvPr id="9" name="ANS_207"/>
           <p:cNvSpPr txBox="1"/>
           <p:nvPr/>
         </p:nvSpPr>
@@ -18226,7 +18441,7 @@
       </p:sp>
       <p:sp>
         <p:nvSpPr>
-          <p:cNvPr id="10" name="ANS_206"/>
+          <p:cNvPr id="10" name="ANS_208"/>
           <p:cNvSpPr txBox="1"/>
           <p:nvPr/>
         </p:nvSpPr>
@@ -18265,7 +18480,7 @@
       </p:sp>
       <p:sp>
         <p:nvSpPr>
-          <p:cNvPr id="11" name="ANS_207"/>
+          <p:cNvPr id="11" name="ANS_209"/>
           <p:cNvSpPr/>
           <p:nvPr/>
         </p:nvSpPr>
@@ -18285,7 +18500,7 @@
       </p:sp>
       <p:sp>
         <p:nvSpPr>
-          <p:cNvPr id="12" name="ANS_208"/>
+          <p:cNvPr id="12" name="ANS_210"/>
           <p:cNvSpPr txBox="1"/>
           <p:nvPr/>
         </p:nvSpPr>

--- a/courseware/202609_DSA_MOOC_Quiz_CH03-04.pptx
+++ b/courseware/202609_DSA_MOOC_Quiz_CH03-04.pptx
@@ -25050,7 +25050,7 @@
                 <a:ea typeface="Microsoft YaHei" pitchFamily="34" charset="-122"/>
                 <a:cs typeface="Microsoft YaHei" pitchFamily="34" charset="-120"/>
               </a:rPr>
-              <a:t>双端队列可以在队列的两端进行插入和删除操作。现有 4 个不同的元素顺序输入到双端队列，那么可以得到 ____ 种不同的排列。</a:t>
+              <a:t>双端队列可以在队列的两端进行插入和删除操作。现有 4 个不同的元素依次从任一端全部入队，再从固定一端依次出队，可以得到 ____ 种不同的排列。</a:t>
             </a:r>
             <a:endParaRPr lang="en-US" sz="2000" dirty="0"/>
           </a:p>
@@ -25253,7 +25253,7 @@
                 <a:ea typeface="Microsoft YaHei" pitchFamily="34" charset="-122"/>
                 <a:cs typeface="Microsoft YaHei" pitchFamily="34" charset="-120"/>
               </a:rPr>
-              <a:t>按题库答案理解：4 个元素先全部入队（每个从左端或右端进入），再从一端依次出队。</a:t>
+              <a:t>本题限定：先全部入队，再从固定一端依次出队；入队、出队不交错。</a:t>
             </a:r>
             <a:endParaRPr lang="en-US" sz="1700" dirty="0"/>
           </a:p>

--- a/courseware/202609_DSA_MOOC_Quiz_CH03-04.pptx
+++ b/courseware/202609_DSA_MOOC_Quiz_CH03-04.pptx
@@ -3524,7 +3524,7 @@
       </p:sp>
       <p:sp>
         <p:nvSpPr>
-          <p:cNvPr id="19" name="ANS_70"/>
+          <p:cNvPr id="19" name="ANS_72"/>
           <p:cNvSpPr/>
           <p:nvPr/>
         </p:nvSpPr>
@@ -3549,7 +3549,7 @@
       </p:sp>
       <p:sp>
         <p:nvSpPr>
-          <p:cNvPr id="20" name="ANS_71"/>
+          <p:cNvPr id="20" name="ANS_73"/>
           <p:cNvSpPr/>
           <p:nvPr/>
         </p:nvSpPr>
@@ -3576,7 +3576,7 @@
       </p:sp>
       <p:sp>
         <p:nvSpPr>
-          <p:cNvPr id="21" name="ANS_72"/>
+          <p:cNvPr id="21" name="ANS_74"/>
           <p:cNvSpPr txBox="1"/>
           <p:nvPr/>
         </p:nvSpPr>
@@ -3615,7 +3615,7 @@
       </p:sp>
       <p:sp>
         <p:nvSpPr>
-          <p:cNvPr id="22" name="ANS_73"/>
+          <p:cNvPr id="22" name="ANS_75"/>
           <p:cNvSpPr txBox="1"/>
           <p:nvPr/>
         </p:nvSpPr>
@@ -3654,7 +3654,7 @@
       </p:sp>
       <p:sp>
         <p:nvSpPr>
-          <p:cNvPr id="23" name="ANS_74"/>
+          <p:cNvPr id="23" name="ANS_76"/>
           <p:cNvSpPr txBox="1"/>
           <p:nvPr/>
         </p:nvSpPr>
@@ -3693,7 +3693,7 @@
       </p:sp>
       <p:sp>
         <p:nvSpPr>
-          <p:cNvPr id="24" name="ANS_75"/>
+          <p:cNvPr id="24" name="ANS_77"/>
           <p:cNvSpPr/>
           <p:nvPr/>
         </p:nvSpPr>
@@ -3713,7 +3713,7 @@
       </p:sp>
       <p:sp>
         <p:nvSpPr>
-          <p:cNvPr id="25" name="ANS_76"/>
+          <p:cNvPr id="25" name="ANS_78"/>
           <p:cNvSpPr txBox="1"/>
           <p:nvPr/>
         </p:nvSpPr>
@@ -3752,7 +3752,7 @@
       </p:sp>
       <p:sp>
         <p:nvSpPr>
-          <p:cNvPr id="26" name="ANS_77"/>
+          <p:cNvPr id="26" name="ANS_79"/>
           <p:cNvSpPr/>
           <p:nvPr/>
         </p:nvSpPr>
@@ -3772,7 +3772,7 @@
       </p:sp>
       <p:sp>
         <p:nvSpPr>
-          <p:cNvPr id="27" name="ANS_78"/>
+          <p:cNvPr id="27" name="ANS_80"/>
           <p:cNvSpPr txBox="1"/>
           <p:nvPr/>
         </p:nvSpPr>
@@ -3811,7 +3811,7 @@
       </p:sp>
       <p:sp>
         <p:nvSpPr>
-          <p:cNvPr id="28" name="ANS_79"/>
+          <p:cNvPr id="28" name="ANS_81"/>
           <p:cNvSpPr/>
           <p:nvPr/>
         </p:nvSpPr>
@@ -3831,7 +3831,7 @@
       </p:sp>
       <p:sp>
         <p:nvSpPr>
-          <p:cNvPr id="29" name="ANS_80"/>
+          <p:cNvPr id="29" name="ANS_82"/>
           <p:cNvSpPr txBox="1"/>
           <p:nvPr/>
         </p:nvSpPr>
@@ -3870,7 +3870,7 @@
       </p:sp>
       <p:sp>
         <p:nvSpPr>
-          <p:cNvPr id="30" name="ANS_81"/>
+          <p:cNvPr id="30" name="ANS_83"/>
           <p:cNvSpPr/>
           <p:nvPr/>
         </p:nvSpPr>
@@ -3890,7 +3890,7 @@
       </p:sp>
       <p:sp>
         <p:nvSpPr>
-          <p:cNvPr id="31" name="ANS_82"/>
+          <p:cNvPr id="31" name="ANS_84"/>
           <p:cNvSpPr txBox="1"/>
           <p:nvPr/>
         </p:nvSpPr>
@@ -5047,7 +5047,7 @@
       </p:sp>
       <p:sp>
         <p:nvSpPr>
-          <p:cNvPr id="19" name="ANS_83"/>
+          <p:cNvPr id="19" name="ANS_85"/>
           <p:cNvSpPr/>
           <p:nvPr/>
         </p:nvSpPr>
@@ -5072,7 +5072,7 @@
       </p:sp>
       <p:sp>
         <p:nvSpPr>
-          <p:cNvPr id="20" name="ANS_84"/>
+          <p:cNvPr id="20" name="ANS_86"/>
           <p:cNvSpPr/>
           <p:nvPr/>
         </p:nvSpPr>
@@ -5099,7 +5099,7 @@
       </p:sp>
       <p:sp>
         <p:nvSpPr>
-          <p:cNvPr id="21" name="ANS_85"/>
+          <p:cNvPr id="21" name="ANS_87"/>
           <p:cNvSpPr txBox="1"/>
           <p:nvPr/>
         </p:nvSpPr>
@@ -5138,7 +5138,7 @@
       </p:sp>
       <p:sp>
         <p:nvSpPr>
-          <p:cNvPr id="22" name="ANS_86"/>
+          <p:cNvPr id="22" name="ANS_88"/>
           <p:cNvSpPr txBox="1"/>
           <p:nvPr/>
         </p:nvSpPr>
@@ -5177,7 +5177,7 @@
       </p:sp>
       <p:sp>
         <p:nvSpPr>
-          <p:cNvPr id="23" name="ANS_87"/>
+          <p:cNvPr id="23" name="ANS_89"/>
           <p:cNvSpPr txBox="1"/>
           <p:nvPr/>
         </p:nvSpPr>
@@ -5216,7 +5216,7 @@
       </p:sp>
       <p:sp>
         <p:nvSpPr>
-          <p:cNvPr id="24" name="ANS_88"/>
+          <p:cNvPr id="24" name="ANS_90"/>
           <p:cNvSpPr/>
           <p:nvPr/>
         </p:nvSpPr>
@@ -5236,7 +5236,7 @@
       </p:sp>
       <p:sp>
         <p:nvSpPr>
-          <p:cNvPr id="25" name="ANS_89"/>
+          <p:cNvPr id="25" name="ANS_91"/>
           <p:cNvSpPr txBox="1"/>
           <p:nvPr/>
         </p:nvSpPr>
@@ -5275,7 +5275,7 @@
       </p:sp>
       <p:sp>
         <p:nvSpPr>
-          <p:cNvPr id="26" name="ANS_90"/>
+          <p:cNvPr id="26" name="ANS_92"/>
           <p:cNvSpPr/>
           <p:nvPr/>
         </p:nvSpPr>
@@ -5295,7 +5295,7 @@
       </p:sp>
       <p:sp>
         <p:nvSpPr>
-          <p:cNvPr id="27" name="ANS_91"/>
+          <p:cNvPr id="27" name="ANS_93"/>
           <p:cNvSpPr txBox="1"/>
           <p:nvPr/>
         </p:nvSpPr>
@@ -6392,7 +6392,7 @@
       </p:sp>
       <p:sp>
         <p:nvSpPr>
-          <p:cNvPr id="21" name="ANS_92"/>
+          <p:cNvPr id="21" name="ANS_94"/>
           <p:cNvSpPr/>
           <p:nvPr/>
         </p:nvSpPr>
@@ -6417,7 +6417,7 @@
       </p:sp>
       <p:sp>
         <p:nvSpPr>
-          <p:cNvPr id="22" name="ANS_93"/>
+          <p:cNvPr id="22" name="ANS_95"/>
           <p:cNvSpPr/>
           <p:nvPr/>
         </p:nvSpPr>
@@ -6444,7 +6444,7 @@
       </p:sp>
       <p:sp>
         <p:nvSpPr>
-          <p:cNvPr id="23" name="ANS_94"/>
+          <p:cNvPr id="23" name="ANS_96"/>
           <p:cNvSpPr txBox="1"/>
           <p:nvPr/>
         </p:nvSpPr>
@@ -6483,7 +6483,7 @@
       </p:sp>
       <p:sp>
         <p:nvSpPr>
-          <p:cNvPr id="24" name="ANS_95"/>
+          <p:cNvPr id="24" name="ANS_97"/>
           <p:cNvSpPr txBox="1"/>
           <p:nvPr/>
         </p:nvSpPr>
@@ -6522,7 +6522,7 @@
       </p:sp>
       <p:sp>
         <p:nvSpPr>
-          <p:cNvPr id="25" name="ANS_96"/>
+          <p:cNvPr id="25" name="ANS_98"/>
           <p:cNvSpPr txBox="1"/>
           <p:nvPr/>
         </p:nvSpPr>
@@ -6561,7 +6561,7 @@
       </p:sp>
       <p:sp>
         <p:nvSpPr>
-          <p:cNvPr id="26" name="ANS_97"/>
+          <p:cNvPr id="26" name="ANS_99"/>
           <p:cNvSpPr/>
           <p:nvPr/>
         </p:nvSpPr>
@@ -6581,7 +6581,7 @@
       </p:sp>
       <p:sp>
         <p:nvSpPr>
-          <p:cNvPr id="27" name="ANS_98"/>
+          <p:cNvPr id="27" name="ANS_100"/>
           <p:cNvSpPr txBox="1"/>
           <p:nvPr/>
         </p:nvSpPr>
@@ -6620,7 +6620,7 @@
       </p:sp>
       <p:sp>
         <p:nvSpPr>
-          <p:cNvPr id="28" name="ANS_99"/>
+          <p:cNvPr id="28" name="ANS_101"/>
           <p:cNvSpPr/>
           <p:nvPr/>
         </p:nvSpPr>
@@ -6640,7 +6640,7 @@
       </p:sp>
       <p:sp>
         <p:nvSpPr>
-          <p:cNvPr id="29" name="ANS_100"/>
+          <p:cNvPr id="29" name="ANS_102"/>
           <p:cNvSpPr txBox="1"/>
           <p:nvPr/>
         </p:nvSpPr>
@@ -6679,7 +6679,7 @@
       </p:sp>
       <p:sp>
         <p:nvSpPr>
-          <p:cNvPr id="30" name="ANS_101"/>
+          <p:cNvPr id="30" name="ANS_103"/>
           <p:cNvSpPr/>
           <p:nvPr/>
         </p:nvSpPr>
@@ -6699,7 +6699,7 @@
       </p:sp>
       <p:sp>
         <p:nvSpPr>
-          <p:cNvPr id="31" name="ANS_102"/>
+          <p:cNvPr id="31" name="ANS_104"/>
           <p:cNvSpPr txBox="1"/>
           <p:nvPr/>
         </p:nvSpPr>
@@ -6738,7 +6738,7 @@
       </p:sp>
       <p:sp>
         <p:nvSpPr>
-          <p:cNvPr id="32" name="ANS_103"/>
+          <p:cNvPr id="32" name="ANS_105"/>
           <p:cNvSpPr/>
           <p:nvPr/>
         </p:nvSpPr>
@@ -6758,7 +6758,7 @@
       </p:sp>
       <p:sp>
         <p:nvSpPr>
-          <p:cNvPr id="33" name="ANS_104"/>
+          <p:cNvPr id="33" name="ANS_106"/>
           <p:cNvSpPr txBox="1"/>
           <p:nvPr/>
         </p:nvSpPr>
@@ -7937,7 +7937,7 @@
       </p:sp>
       <p:sp>
         <p:nvSpPr>
-          <p:cNvPr id="19" name="ANS_105"/>
+          <p:cNvPr id="19" name="ANS_107"/>
           <p:cNvSpPr/>
           <p:nvPr/>
         </p:nvSpPr>
@@ -7962,7 +7962,7 @@
       </p:sp>
       <p:sp>
         <p:nvSpPr>
-          <p:cNvPr id="20" name="ANS_106"/>
+          <p:cNvPr id="20" name="ANS_108"/>
           <p:cNvSpPr/>
           <p:nvPr/>
         </p:nvSpPr>
@@ -7989,7 +7989,7 @@
       </p:sp>
       <p:sp>
         <p:nvSpPr>
-          <p:cNvPr id="21" name="ANS_107"/>
+          <p:cNvPr id="21" name="ANS_109"/>
           <p:cNvSpPr txBox="1"/>
           <p:nvPr/>
         </p:nvSpPr>
@@ -8028,7 +8028,7 @@
       </p:sp>
       <p:sp>
         <p:nvSpPr>
-          <p:cNvPr id="22" name="ANS_108"/>
+          <p:cNvPr id="22" name="ANS_110"/>
           <p:cNvSpPr txBox="1"/>
           <p:nvPr/>
         </p:nvSpPr>
@@ -8067,7 +8067,7 @@
       </p:sp>
       <p:sp>
         <p:nvSpPr>
-          <p:cNvPr id="23" name="ANS_109"/>
+          <p:cNvPr id="23" name="ANS_111"/>
           <p:cNvSpPr txBox="1"/>
           <p:nvPr/>
         </p:nvSpPr>
@@ -8106,7 +8106,7 @@
       </p:sp>
       <p:sp>
         <p:nvSpPr>
-          <p:cNvPr id="24" name="ANS_110"/>
+          <p:cNvPr id="24" name="ANS_112"/>
           <p:cNvSpPr/>
           <p:nvPr/>
         </p:nvSpPr>
@@ -8126,7 +8126,7 @@
       </p:sp>
       <p:sp>
         <p:nvSpPr>
-          <p:cNvPr id="25" name="ANS_111"/>
+          <p:cNvPr id="25" name="ANS_113"/>
           <p:cNvSpPr txBox="1"/>
           <p:nvPr/>
         </p:nvSpPr>
@@ -8165,7 +8165,7 @@
       </p:sp>
       <p:sp>
         <p:nvSpPr>
-          <p:cNvPr id="26" name="ANS_112"/>
+          <p:cNvPr id="26" name="ANS_114"/>
           <p:cNvSpPr/>
           <p:nvPr/>
         </p:nvSpPr>
@@ -8185,7 +8185,7 @@
       </p:sp>
       <p:sp>
         <p:nvSpPr>
-          <p:cNvPr id="27" name="ANS_113"/>
+          <p:cNvPr id="27" name="ANS_115"/>
           <p:cNvSpPr txBox="1"/>
           <p:nvPr/>
         </p:nvSpPr>
@@ -8224,7 +8224,7 @@
       </p:sp>
       <p:sp>
         <p:nvSpPr>
-          <p:cNvPr id="28" name="ANS_114"/>
+          <p:cNvPr id="28" name="ANS_116"/>
           <p:cNvSpPr/>
           <p:nvPr/>
         </p:nvSpPr>
@@ -8244,7 +8244,7 @@
       </p:sp>
       <p:sp>
         <p:nvSpPr>
-          <p:cNvPr id="29" name="ANS_115"/>
+          <p:cNvPr id="29" name="ANS_117"/>
           <p:cNvSpPr txBox="1"/>
           <p:nvPr/>
         </p:nvSpPr>
@@ -9225,7 +9225,7 @@
       </p:sp>
       <p:sp>
         <p:nvSpPr>
-          <p:cNvPr id="15" name="ANS_116"/>
+          <p:cNvPr id="15" name="ANS_118"/>
           <p:cNvSpPr/>
           <p:nvPr/>
         </p:nvSpPr>
@@ -9250,7 +9250,7 @@
       </p:sp>
       <p:sp>
         <p:nvSpPr>
-          <p:cNvPr id="16" name="ANS_117"/>
+          <p:cNvPr id="16" name="ANS_119"/>
           <p:cNvSpPr/>
           <p:nvPr/>
         </p:nvSpPr>
@@ -9277,7 +9277,7 @@
       </p:sp>
       <p:sp>
         <p:nvSpPr>
-          <p:cNvPr id="17" name="ANS_118"/>
+          <p:cNvPr id="17" name="ANS_120"/>
           <p:cNvSpPr txBox="1"/>
           <p:nvPr/>
         </p:nvSpPr>
@@ -9316,7 +9316,7 @@
       </p:sp>
       <p:sp>
         <p:nvSpPr>
-          <p:cNvPr id="18" name="ANS_119"/>
+          <p:cNvPr id="18" name="ANS_121"/>
           <p:cNvSpPr txBox="1"/>
           <p:nvPr/>
         </p:nvSpPr>
@@ -9355,7 +9355,7 @@
       </p:sp>
       <p:sp>
         <p:nvSpPr>
-          <p:cNvPr id="19" name="ANS_120"/>
+          <p:cNvPr id="19" name="ANS_122"/>
           <p:cNvSpPr txBox="1"/>
           <p:nvPr/>
         </p:nvSpPr>
@@ -9394,7 +9394,7 @@
       </p:sp>
       <p:sp>
         <p:nvSpPr>
-          <p:cNvPr id="20" name="ANS_121"/>
+          <p:cNvPr id="20" name="ANS_123"/>
           <p:cNvSpPr/>
           <p:nvPr/>
         </p:nvSpPr>
@@ -9414,7 +9414,7 @@
       </p:sp>
       <p:sp>
         <p:nvSpPr>
-          <p:cNvPr id="21" name="ANS_122"/>
+          <p:cNvPr id="21" name="ANS_124"/>
           <p:cNvSpPr txBox="1"/>
           <p:nvPr/>
         </p:nvSpPr>
@@ -10395,7 +10395,7 @@
       </p:sp>
       <p:sp>
         <p:nvSpPr>
-          <p:cNvPr id="19" name="ANS_123"/>
+          <p:cNvPr id="19" name="ANS_125"/>
           <p:cNvSpPr/>
           <p:nvPr/>
         </p:nvSpPr>
@@ -10420,7 +10420,7 @@
       </p:sp>
       <p:sp>
         <p:nvSpPr>
-          <p:cNvPr id="20" name="ANS_124"/>
+          <p:cNvPr id="20" name="ANS_126"/>
           <p:cNvSpPr/>
           <p:nvPr/>
         </p:nvSpPr>
@@ -10445,7 +10445,7 @@
       </p:sp>
       <p:sp>
         <p:nvSpPr>
-          <p:cNvPr id="21" name="ANS_125"/>
+          <p:cNvPr id="21" name="ANS_127"/>
           <p:cNvSpPr/>
           <p:nvPr/>
         </p:nvSpPr>
@@ -10470,7 +10470,7 @@
       </p:sp>
       <p:sp>
         <p:nvSpPr>
-          <p:cNvPr id="22" name="ANS_126"/>
+          <p:cNvPr id="22" name="ANS_128"/>
           <p:cNvSpPr/>
           <p:nvPr/>
         </p:nvSpPr>
@@ -10495,7 +10495,7 @@
       </p:sp>
       <p:sp>
         <p:nvSpPr>
-          <p:cNvPr id="23" name="ANS_127"/>
+          <p:cNvPr id="23" name="ANS_129"/>
           <p:cNvSpPr/>
           <p:nvPr/>
         </p:nvSpPr>
@@ -10522,7 +10522,7 @@
       </p:sp>
       <p:sp>
         <p:nvSpPr>
-          <p:cNvPr id="24" name="ANS_128"/>
+          <p:cNvPr id="24" name="ANS_130"/>
           <p:cNvSpPr txBox="1"/>
           <p:nvPr/>
         </p:nvSpPr>
@@ -10561,7 +10561,7 @@
       </p:sp>
       <p:sp>
         <p:nvSpPr>
-          <p:cNvPr id="25" name="ANS_129"/>
+          <p:cNvPr id="25" name="ANS_131"/>
           <p:cNvSpPr txBox="1"/>
           <p:nvPr/>
         </p:nvSpPr>
@@ -10600,7 +10600,7 @@
       </p:sp>
       <p:sp>
         <p:nvSpPr>
-          <p:cNvPr id="26" name="ANS_130"/>
+          <p:cNvPr id="26" name="ANS_132"/>
           <p:cNvSpPr txBox="1"/>
           <p:nvPr/>
         </p:nvSpPr>
@@ -10639,7 +10639,7 @@
       </p:sp>
       <p:sp>
         <p:nvSpPr>
-          <p:cNvPr id="27" name="ANS_131"/>
+          <p:cNvPr id="27" name="ANS_133"/>
           <p:cNvSpPr/>
           <p:nvPr/>
         </p:nvSpPr>
@@ -10659,7 +10659,7 @@
       </p:sp>
       <p:sp>
         <p:nvSpPr>
-          <p:cNvPr id="28" name="ANS_132"/>
+          <p:cNvPr id="28" name="ANS_134"/>
           <p:cNvSpPr txBox="1"/>
           <p:nvPr/>
         </p:nvSpPr>
@@ -10698,7 +10698,7 @@
       </p:sp>
       <p:sp>
         <p:nvSpPr>
-          <p:cNvPr id="29" name="ANS_133"/>
+          <p:cNvPr id="29" name="ANS_135"/>
           <p:cNvSpPr/>
           <p:nvPr/>
         </p:nvSpPr>
@@ -10718,7 +10718,7 @@
       </p:sp>
       <p:sp>
         <p:nvSpPr>
-          <p:cNvPr id="30" name="ANS_134"/>
+          <p:cNvPr id="30" name="ANS_136"/>
           <p:cNvSpPr txBox="1"/>
           <p:nvPr/>
         </p:nvSpPr>
@@ -10757,7 +10757,7 @@
       </p:sp>
       <p:sp>
         <p:nvSpPr>
-          <p:cNvPr id="31" name="ANS_135"/>
+          <p:cNvPr id="31" name="ANS_137"/>
           <p:cNvSpPr/>
           <p:nvPr/>
         </p:nvSpPr>
@@ -10777,7 +10777,7 @@
       </p:sp>
       <p:sp>
         <p:nvSpPr>
-          <p:cNvPr id="32" name="ANS_136"/>
+          <p:cNvPr id="32" name="ANS_138"/>
           <p:cNvSpPr txBox="1"/>
           <p:nvPr/>
         </p:nvSpPr>
@@ -10816,7 +10816,7 @@
       </p:sp>
       <p:sp>
         <p:nvSpPr>
-          <p:cNvPr id="33" name="ANS_137"/>
+          <p:cNvPr id="33" name="ANS_139"/>
           <p:cNvSpPr/>
           <p:nvPr/>
         </p:nvSpPr>
@@ -10836,7 +10836,7 @@
       </p:sp>
       <p:sp>
         <p:nvSpPr>
-          <p:cNvPr id="34" name="ANS_138"/>
+          <p:cNvPr id="34" name="ANS_140"/>
           <p:cNvSpPr txBox="1"/>
           <p:nvPr/>
         </p:nvSpPr>
@@ -10875,7 +10875,7 @@
       </p:sp>
       <p:sp>
         <p:nvSpPr>
-          <p:cNvPr id="35" name="ANS_139"/>
+          <p:cNvPr id="35" name="ANS_141"/>
           <p:cNvSpPr/>
           <p:nvPr/>
         </p:nvSpPr>
@@ -10895,7 +10895,7 @@
       </p:sp>
       <p:sp>
         <p:nvSpPr>
-          <p:cNvPr id="36" name="ANS_140"/>
+          <p:cNvPr id="36" name="ANS_142"/>
           <p:cNvSpPr txBox="1"/>
           <p:nvPr/>
         </p:nvSpPr>
@@ -11840,7 +11840,7 @@
       </p:sp>
       <p:sp>
         <p:nvSpPr>
-          <p:cNvPr id="7" name="ANS_141"/>
+          <p:cNvPr id="7" name="ANS_143"/>
           <p:cNvSpPr/>
           <p:nvPr/>
         </p:nvSpPr>
@@ -11867,7 +11867,7 @@
       </p:sp>
       <p:sp>
         <p:nvSpPr>
-          <p:cNvPr id="8" name="ANS_142"/>
+          <p:cNvPr id="8" name="ANS_144"/>
           <p:cNvSpPr txBox="1"/>
           <p:nvPr/>
         </p:nvSpPr>
@@ -11906,7 +11906,7 @@
       </p:sp>
       <p:sp>
         <p:nvSpPr>
-          <p:cNvPr id="9" name="ANS_143"/>
+          <p:cNvPr id="9" name="ANS_145"/>
           <p:cNvSpPr txBox="1"/>
           <p:nvPr/>
         </p:nvSpPr>
@@ -11945,7 +11945,7 @@
       </p:sp>
       <p:sp>
         <p:nvSpPr>
-          <p:cNvPr id="10" name="ANS_144"/>
+          <p:cNvPr id="10" name="ANS_146"/>
           <p:cNvSpPr txBox="1"/>
           <p:nvPr/>
         </p:nvSpPr>
@@ -11984,7 +11984,7 @@
       </p:sp>
       <p:sp>
         <p:nvSpPr>
-          <p:cNvPr id="11" name="ANS_145"/>
+          <p:cNvPr id="11" name="ANS_147"/>
           <p:cNvSpPr/>
           <p:nvPr/>
         </p:nvSpPr>
@@ -12004,7 +12004,7 @@
       </p:sp>
       <p:sp>
         <p:nvSpPr>
-          <p:cNvPr id="12" name="ANS_146"/>
+          <p:cNvPr id="12" name="ANS_148"/>
           <p:cNvSpPr txBox="1"/>
           <p:nvPr/>
         </p:nvSpPr>
@@ -12043,7 +12043,7 @@
       </p:sp>
       <p:sp>
         <p:nvSpPr>
-          <p:cNvPr id="13" name="ANS_147"/>
+          <p:cNvPr id="13" name="ANS_149"/>
           <p:cNvSpPr/>
           <p:nvPr/>
         </p:nvSpPr>
@@ -12063,7 +12063,7 @@
       </p:sp>
       <p:sp>
         <p:nvSpPr>
-          <p:cNvPr id="14" name="ANS_148"/>
+          <p:cNvPr id="14" name="ANS_150"/>
           <p:cNvSpPr txBox="1"/>
           <p:nvPr/>
         </p:nvSpPr>
@@ -12102,7 +12102,7 @@
       </p:sp>
       <p:sp>
         <p:nvSpPr>
-          <p:cNvPr id="15" name="ANS_149"/>
+          <p:cNvPr id="15" name="ANS_151"/>
           <p:cNvSpPr/>
           <p:nvPr/>
         </p:nvSpPr>
@@ -12122,7 +12122,7 @@
       </p:sp>
       <p:sp>
         <p:nvSpPr>
-          <p:cNvPr id="16" name="ANS_150"/>
+          <p:cNvPr id="16" name="ANS_152"/>
           <p:cNvSpPr txBox="1"/>
           <p:nvPr/>
         </p:nvSpPr>
@@ -12943,7 +12943,7 @@
       </p:sp>
       <p:sp>
         <p:nvSpPr>
-          <p:cNvPr id="9" name="ANS_151"/>
+          <p:cNvPr id="9" name="ANS_153"/>
           <p:cNvSpPr/>
           <p:nvPr/>
         </p:nvSpPr>
@@ -12970,7 +12970,7 @@
       </p:sp>
       <p:sp>
         <p:nvSpPr>
-          <p:cNvPr id="10" name="ANS_152"/>
+          <p:cNvPr id="10" name="ANS_154"/>
           <p:cNvSpPr txBox="1"/>
           <p:nvPr/>
         </p:nvSpPr>
@@ -13009,7 +13009,7 @@
       </p:sp>
       <p:sp>
         <p:nvSpPr>
-          <p:cNvPr id="11" name="ANS_153"/>
+          <p:cNvPr id="11" name="ANS_155"/>
           <p:cNvSpPr txBox="1"/>
           <p:nvPr/>
         </p:nvSpPr>
@@ -13048,7 +13048,7 @@
       </p:sp>
       <p:sp>
         <p:nvSpPr>
-          <p:cNvPr id="12" name="ANS_154"/>
+          <p:cNvPr id="12" name="ANS_156"/>
           <p:cNvSpPr txBox="1"/>
           <p:nvPr/>
         </p:nvSpPr>
@@ -13087,7 +13087,7 @@
       </p:sp>
       <p:sp>
         <p:nvSpPr>
-          <p:cNvPr id="13" name="ANS_155"/>
+          <p:cNvPr id="13" name="ANS_157"/>
           <p:cNvSpPr/>
           <p:nvPr/>
         </p:nvSpPr>
@@ -13107,7 +13107,7 @@
       </p:sp>
       <p:sp>
         <p:nvSpPr>
-          <p:cNvPr id="14" name="ANS_156"/>
+          <p:cNvPr id="14" name="ANS_158"/>
           <p:cNvSpPr txBox="1"/>
           <p:nvPr/>
         </p:nvSpPr>
@@ -13168,7 +13168,7 @@
       </p:sp>
       <p:sp>
         <p:nvSpPr>
-          <p:cNvPr id="15" name="ANS_157"/>
+          <p:cNvPr id="15" name="ANS_159"/>
           <p:cNvSpPr/>
           <p:nvPr/>
         </p:nvSpPr>
@@ -13188,7 +13188,7 @@
       </p:sp>
       <p:sp>
         <p:nvSpPr>
-          <p:cNvPr id="16" name="ANS_158"/>
+          <p:cNvPr id="16" name="ANS_160"/>
           <p:cNvSpPr txBox="1"/>
           <p:nvPr/>
         </p:nvSpPr>
@@ -13238,7 +13238,7 @@
       </p:sp>
       <p:sp>
         <p:nvSpPr>
-          <p:cNvPr id="17" name="ANS_159"/>
+          <p:cNvPr id="17" name="ANS_161"/>
           <p:cNvSpPr/>
           <p:nvPr/>
         </p:nvSpPr>
@@ -13258,7 +13258,7 @@
       </p:sp>
       <p:sp>
         <p:nvSpPr>
-          <p:cNvPr id="18" name="ANS_160"/>
+          <p:cNvPr id="18" name="ANS_162"/>
           <p:cNvSpPr txBox="1"/>
           <p:nvPr/>
         </p:nvSpPr>
@@ -13297,7 +13297,7 @@
       </p:sp>
       <p:sp>
         <p:nvSpPr>
-          <p:cNvPr id="19" name="ANS_161"/>
+          <p:cNvPr id="19" name="ANS_163"/>
           <p:cNvSpPr/>
           <p:nvPr/>
         </p:nvSpPr>
@@ -13317,7 +13317,7 @@
       </p:sp>
       <p:sp>
         <p:nvSpPr>
-          <p:cNvPr id="20" name="ANS_162"/>
+          <p:cNvPr id="20" name="ANS_164"/>
           <p:cNvSpPr txBox="1"/>
           <p:nvPr/>
         </p:nvSpPr>
@@ -14068,7 +14068,7 @@
       </p:sp>
       <p:sp>
         <p:nvSpPr>
-          <p:cNvPr id="7" name="ANS_163"/>
+          <p:cNvPr id="7" name="ANS_165"/>
           <p:cNvSpPr/>
           <p:nvPr/>
         </p:nvSpPr>
@@ -14095,7 +14095,7 @@
       </p:sp>
       <p:sp>
         <p:nvSpPr>
-          <p:cNvPr id="8" name="ANS_164"/>
+          <p:cNvPr id="8" name="ANS_166"/>
           <p:cNvSpPr txBox="1"/>
           <p:nvPr/>
         </p:nvSpPr>
@@ -14134,7 +14134,7 @@
       </p:sp>
       <p:sp>
         <p:nvSpPr>
-          <p:cNvPr id="9" name="ANS_165"/>
+          <p:cNvPr id="9" name="ANS_167"/>
           <p:cNvSpPr txBox="1"/>
           <p:nvPr/>
         </p:nvSpPr>
@@ -14173,7 +14173,7 @@
       </p:sp>
       <p:sp>
         <p:nvSpPr>
-          <p:cNvPr id="10" name="ANS_166"/>
+          <p:cNvPr id="10" name="ANS_168"/>
           <p:cNvSpPr txBox="1"/>
           <p:nvPr/>
         </p:nvSpPr>
@@ -14212,7 +14212,7 @@
       </p:sp>
       <p:sp>
         <p:nvSpPr>
-          <p:cNvPr id="11" name="ANS_167"/>
+          <p:cNvPr id="11" name="ANS_169"/>
           <p:cNvSpPr/>
           <p:nvPr/>
         </p:nvSpPr>
@@ -14232,7 +14232,7 @@
       </p:sp>
       <p:sp>
         <p:nvSpPr>
-          <p:cNvPr id="12" name="ANS_168"/>
+          <p:cNvPr id="12" name="ANS_170"/>
           <p:cNvSpPr txBox="1"/>
           <p:nvPr/>
         </p:nvSpPr>
@@ -14271,7 +14271,7 @@
       </p:sp>
       <p:sp>
         <p:nvSpPr>
-          <p:cNvPr id="13" name="ANS_169"/>
+          <p:cNvPr id="13" name="ANS_171"/>
           <p:cNvSpPr/>
           <p:nvPr/>
         </p:nvSpPr>
@@ -14291,7 +14291,7 @@
       </p:sp>
       <p:sp>
         <p:nvSpPr>
-          <p:cNvPr id="14" name="ANS_170"/>
+          <p:cNvPr id="14" name="ANS_172"/>
           <p:cNvSpPr txBox="1"/>
           <p:nvPr/>
         </p:nvSpPr>
@@ -14330,7 +14330,7 @@
       </p:sp>
       <p:sp>
         <p:nvSpPr>
-          <p:cNvPr id="15" name="ANS_171"/>
+          <p:cNvPr id="15" name="ANS_173"/>
           <p:cNvSpPr/>
           <p:nvPr/>
         </p:nvSpPr>
@@ -14350,7 +14350,7 @@
       </p:sp>
       <p:sp>
         <p:nvSpPr>
-          <p:cNvPr id="16" name="ANS_172"/>
+          <p:cNvPr id="16" name="ANS_174"/>
           <p:cNvSpPr txBox="1"/>
           <p:nvPr/>
         </p:nvSpPr>
@@ -14389,7 +14389,7 @@
       </p:sp>
       <p:sp>
         <p:nvSpPr>
-          <p:cNvPr id="17" name="ANS_173"/>
+          <p:cNvPr id="17" name="ANS_175"/>
           <p:cNvSpPr/>
           <p:nvPr/>
         </p:nvSpPr>
@@ -14409,7 +14409,7 @@
       </p:sp>
       <p:sp>
         <p:nvSpPr>
-          <p:cNvPr id="18" name="ANS_174"/>
+          <p:cNvPr id="18" name="ANS_176"/>
           <p:cNvSpPr txBox="1"/>
           <p:nvPr/>
         </p:nvSpPr>
@@ -15222,7 +15222,7 @@
       </p:sp>
       <p:sp>
         <p:nvSpPr>
-          <p:cNvPr id="9" name="ANS_175"/>
+          <p:cNvPr id="9" name="ANS_177"/>
           <p:cNvSpPr/>
           <p:nvPr/>
         </p:nvSpPr>
@@ -15249,7 +15249,7 @@
       </p:sp>
       <p:sp>
         <p:nvSpPr>
-          <p:cNvPr id="10" name="ANS_176"/>
+          <p:cNvPr id="10" name="ANS_178"/>
           <p:cNvSpPr txBox="1"/>
           <p:nvPr/>
         </p:nvSpPr>
@@ -15288,7 +15288,7 @@
       </p:sp>
       <p:sp>
         <p:nvSpPr>
-          <p:cNvPr id="11" name="ANS_177"/>
+          <p:cNvPr id="11" name="ANS_179"/>
           <p:cNvSpPr txBox="1"/>
           <p:nvPr/>
         </p:nvSpPr>
@@ -15327,7 +15327,7 @@
       </p:sp>
       <p:sp>
         <p:nvSpPr>
-          <p:cNvPr id="12" name="ANS_178"/>
+          <p:cNvPr id="12" name="ANS_180"/>
           <p:cNvSpPr txBox="1"/>
           <p:nvPr/>
         </p:nvSpPr>
@@ -15366,7 +15366,7 @@
       </p:sp>
       <p:sp>
         <p:nvSpPr>
-          <p:cNvPr id="13" name="ANS_179"/>
+          <p:cNvPr id="13" name="ANS_181"/>
           <p:cNvSpPr/>
           <p:nvPr/>
         </p:nvSpPr>
@@ -15386,7 +15386,7 @@
       </p:sp>
       <p:sp>
         <p:nvSpPr>
-          <p:cNvPr id="14" name="ANS_180"/>
+          <p:cNvPr id="14" name="ANS_182"/>
           <p:cNvSpPr txBox="1"/>
           <p:nvPr/>
         </p:nvSpPr>
@@ -15425,7 +15425,7 @@
       </p:sp>
       <p:sp>
         <p:nvSpPr>
-          <p:cNvPr id="15" name="ANS_181"/>
+          <p:cNvPr id="15" name="ANS_183"/>
           <p:cNvSpPr/>
           <p:nvPr/>
         </p:nvSpPr>
@@ -15445,7 +15445,7 @@
       </p:sp>
       <p:sp>
         <p:nvSpPr>
-          <p:cNvPr id="16" name="ANS_182"/>
+          <p:cNvPr id="16" name="ANS_184"/>
           <p:cNvSpPr txBox="1"/>
           <p:nvPr/>
         </p:nvSpPr>
@@ -15484,7 +15484,7 @@
       </p:sp>
       <p:sp>
         <p:nvSpPr>
-          <p:cNvPr id="17" name="ANS_183"/>
+          <p:cNvPr id="17" name="ANS_185"/>
           <p:cNvSpPr/>
           <p:nvPr/>
         </p:nvSpPr>
@@ -15504,7 +15504,7 @@
       </p:sp>
       <p:sp>
         <p:nvSpPr>
-          <p:cNvPr id="18" name="ANS_184"/>
+          <p:cNvPr id="18" name="ANS_186"/>
           <p:cNvSpPr txBox="1"/>
           <p:nvPr/>
         </p:nvSpPr>
@@ -15543,7 +15543,7 @@
       </p:sp>
       <p:sp>
         <p:nvSpPr>
-          <p:cNvPr id="19" name="ANS_185"/>
+          <p:cNvPr id="19" name="ANS_187"/>
           <p:cNvSpPr/>
           <p:nvPr/>
         </p:nvSpPr>
@@ -15563,7 +15563,7 @@
       </p:sp>
       <p:sp>
         <p:nvSpPr>
-          <p:cNvPr id="20" name="ANS_186"/>
+          <p:cNvPr id="20" name="ANS_188"/>
           <p:cNvSpPr txBox="1"/>
           <p:nvPr/>
         </p:nvSpPr>
@@ -16589,7 +16589,7 @@
       </p:sp>
       <p:sp>
         <p:nvSpPr>
-          <p:cNvPr id="9" name="ANS_187"/>
+          <p:cNvPr id="9" name="ANS_189"/>
           <p:cNvSpPr/>
           <p:nvPr/>
         </p:nvSpPr>
@@ -16616,7 +16616,7 @@
       </p:sp>
       <p:sp>
         <p:nvSpPr>
-          <p:cNvPr id="10" name="ANS_188"/>
+          <p:cNvPr id="10" name="ANS_190"/>
           <p:cNvSpPr txBox="1"/>
           <p:nvPr/>
         </p:nvSpPr>
@@ -16655,7 +16655,7 @@
       </p:sp>
       <p:sp>
         <p:nvSpPr>
-          <p:cNvPr id="11" name="ANS_189"/>
+          <p:cNvPr id="11" name="ANS_191"/>
           <p:cNvSpPr txBox="1"/>
           <p:nvPr/>
         </p:nvSpPr>
@@ -16694,7 +16694,7 @@
       </p:sp>
       <p:sp>
         <p:nvSpPr>
-          <p:cNvPr id="12" name="ANS_190"/>
+          <p:cNvPr id="12" name="ANS_192"/>
           <p:cNvSpPr txBox="1"/>
           <p:nvPr/>
         </p:nvSpPr>
@@ -16733,7 +16733,7 @@
       </p:sp>
       <p:sp>
         <p:nvSpPr>
-          <p:cNvPr id="13" name="ANS_191"/>
+          <p:cNvPr id="13" name="ANS_193"/>
           <p:cNvSpPr/>
           <p:nvPr/>
         </p:nvSpPr>
@@ -16753,7 +16753,7 @@
       </p:sp>
       <p:sp>
         <p:nvSpPr>
-          <p:cNvPr id="14" name="ANS_192"/>
+          <p:cNvPr id="14" name="ANS_194"/>
           <p:cNvSpPr txBox="1"/>
           <p:nvPr/>
         </p:nvSpPr>
@@ -16792,7 +16792,7 @@
       </p:sp>
       <p:sp>
         <p:nvSpPr>
-          <p:cNvPr id="15" name="ANS_193"/>
+          <p:cNvPr id="15" name="ANS_195"/>
           <p:cNvSpPr/>
           <p:nvPr/>
         </p:nvSpPr>
@@ -16812,7 +16812,7 @@
       </p:sp>
       <p:sp>
         <p:nvSpPr>
-          <p:cNvPr id="16" name="ANS_194"/>
+          <p:cNvPr id="16" name="ANS_196"/>
           <p:cNvSpPr txBox="1"/>
           <p:nvPr/>
         </p:nvSpPr>
@@ -16851,7 +16851,7 @@
       </p:sp>
       <p:sp>
         <p:nvSpPr>
-          <p:cNvPr id="17" name="ANS_195"/>
+          <p:cNvPr id="17" name="ANS_197"/>
           <p:cNvSpPr/>
           <p:nvPr/>
         </p:nvSpPr>
@@ -16871,7 +16871,7 @@
       </p:sp>
       <p:sp>
         <p:nvSpPr>
-          <p:cNvPr id="18" name="ANS_196"/>
+          <p:cNvPr id="18" name="ANS_198"/>
           <p:cNvSpPr txBox="1"/>
           <p:nvPr/>
         </p:nvSpPr>
@@ -17528,7 +17528,7 @@
       </p:sp>
       <p:sp>
         <p:nvSpPr>
-          <p:cNvPr id="7" name="ANS_197"/>
+          <p:cNvPr id="7" name="ANS_199"/>
           <p:cNvSpPr/>
           <p:nvPr/>
         </p:nvSpPr>
@@ -17555,7 +17555,7 @@
       </p:sp>
       <p:sp>
         <p:nvSpPr>
-          <p:cNvPr id="8" name="ANS_198"/>
+          <p:cNvPr id="8" name="ANS_200"/>
           <p:cNvSpPr txBox="1"/>
           <p:nvPr/>
         </p:nvSpPr>
@@ -17594,7 +17594,7 @@
       </p:sp>
       <p:sp>
         <p:nvSpPr>
-          <p:cNvPr id="9" name="ANS_199"/>
+          <p:cNvPr id="9" name="ANS_201"/>
           <p:cNvSpPr txBox="1"/>
           <p:nvPr/>
         </p:nvSpPr>
@@ -17633,7 +17633,7 @@
       </p:sp>
       <p:sp>
         <p:nvSpPr>
-          <p:cNvPr id="10" name="ANS_200"/>
+          <p:cNvPr id="10" name="ANS_202"/>
           <p:cNvSpPr txBox="1"/>
           <p:nvPr/>
         </p:nvSpPr>
@@ -17672,7 +17672,7 @@
       </p:sp>
       <p:sp>
         <p:nvSpPr>
-          <p:cNvPr id="11" name="ANS_201"/>
+          <p:cNvPr id="11" name="ANS_203"/>
           <p:cNvSpPr/>
           <p:nvPr/>
         </p:nvSpPr>
@@ -17692,7 +17692,7 @@
       </p:sp>
       <p:sp>
         <p:nvSpPr>
-          <p:cNvPr id="12" name="ANS_202"/>
+          <p:cNvPr id="12" name="ANS_204"/>
           <p:cNvSpPr txBox="1"/>
           <p:nvPr/>
         </p:nvSpPr>
@@ -17731,7 +17731,7 @@
       </p:sp>
       <p:sp>
         <p:nvSpPr>
-          <p:cNvPr id="13" name="ANS_203"/>
+          <p:cNvPr id="13" name="ANS_205"/>
           <p:cNvSpPr/>
           <p:nvPr/>
         </p:nvSpPr>
@@ -17751,7 +17751,7 @@
       </p:sp>
       <p:sp>
         <p:nvSpPr>
-          <p:cNvPr id="14" name="ANS_204"/>
+          <p:cNvPr id="14" name="ANS_206"/>
           <p:cNvSpPr txBox="1"/>
           <p:nvPr/>
         </p:nvSpPr>
@@ -18336,7 +18336,7 @@
       </p:sp>
       <p:sp>
         <p:nvSpPr>
-          <p:cNvPr id="7" name="ANS_205"/>
+          <p:cNvPr id="7" name="ANS_207"/>
           <p:cNvSpPr/>
           <p:nvPr/>
         </p:nvSpPr>
@@ -18363,7 +18363,7 @@
       </p:sp>
       <p:sp>
         <p:nvSpPr>
-          <p:cNvPr id="8" name="ANS_206"/>
+          <p:cNvPr id="8" name="ANS_208"/>
           <p:cNvSpPr txBox="1"/>
           <p:nvPr/>
         </p:nvSpPr>
@@ -18402,7 +18402,7 @@
       </p:sp>
       <p:sp>
         <p:nvSpPr>
-          <p:cNvPr id="9" name="ANS_207"/>
+          <p:cNvPr id="9" name="ANS_209"/>
           <p:cNvSpPr txBox="1"/>
           <p:nvPr/>
         </p:nvSpPr>
@@ -18441,7 +18441,7 @@
       </p:sp>
       <p:sp>
         <p:nvSpPr>
-          <p:cNvPr id="10" name="ANS_208"/>
+          <p:cNvPr id="10" name="ANS_210"/>
           <p:cNvSpPr txBox="1"/>
           <p:nvPr/>
         </p:nvSpPr>
@@ -18480,7 +18480,7 @@
       </p:sp>
       <p:sp>
         <p:nvSpPr>
-          <p:cNvPr id="11" name="ANS_209"/>
+          <p:cNvPr id="11" name="ANS_211"/>
           <p:cNvSpPr/>
           <p:nvPr/>
         </p:nvSpPr>
@@ -18500,7 +18500,7 @@
       </p:sp>
       <p:sp>
         <p:nvSpPr>
-          <p:cNvPr id="12" name="ANS_210"/>
+          <p:cNvPr id="12" name="ANS_212"/>
           <p:cNvSpPr txBox="1"/>
           <p:nvPr/>
         </p:nvSpPr>
@@ -22120,7 +22120,7 @@
         <p:spPr>
           <a:xfrm>
             <a:off x="548640" y="1645920"/>
-            <a:ext cx="6309360" cy="725424"/>
+            <a:ext cx="6309360" cy="1194816"/>
           </a:xfrm>
           <a:prstGeom prst="rect">
             <a:avLst/>
@@ -22136,7 +22136,7 @@
               <a:buNone/>
             </a:pPr>
             <a:r>
-              <a:rPr lang="en-US" sz="2000" dirty="0">
+              <a:rPr lang="en-US" sz="1700" dirty="0">
                 <a:solidFill>
                   <a:srgbClr val="222222"/>
                 </a:solidFill>
@@ -22144,9 +22144,9 @@
                 <a:ea typeface="Microsoft YaHei" pitchFamily="34" charset="-122"/>
                 <a:cs typeface="Microsoft YaHei" pitchFamily="34" charset="-120"/>
               </a:rPr>
-              <a:t>以下循环队列的实现方式中，长度为 n 的队列，所能容纳的元素个数也为 n 的有：</a:t>
-            </a:r>
-            <a:endParaRPr lang="en-US" sz="2000" dirty="0"/>
+              <a:t>以下循环队列的实现方式中，长度为 n 的队列，所能容纳的元素个数也为 n 的有：（front、rear 都是 0…n−1 的数组下标，移动时对 n 取模；实指：指针指向队头 / 队尾元素本身；虚指：rear 指向队尾元素的下一个空位）</a:t>
+            </a:r>
+            <a:endParaRPr lang="en-US" sz="1700" dirty="0"/>
           </a:p>
         </p:txBody>
       </p:sp>
@@ -22158,8 +22158,8 @@
         </p:nvSpPr>
         <p:spPr>
           <a:xfrm>
-            <a:off x="548640" y="2816352"/>
-            <a:ext cx="384048" cy="384048"/>
+            <a:off x="548640" y="3198419"/>
+            <a:ext cx="381305" cy="381305"/>
           </a:xfrm>
           <a:prstGeom prst="ellipse">
             <a:avLst/>
@@ -22178,8 +22178,8 @@
         </p:nvSpPr>
         <p:spPr>
           <a:xfrm>
-            <a:off x="548640" y="2816352"/>
-            <a:ext cx="384048" cy="384048"/>
+            <a:off x="548640" y="3198419"/>
+            <a:ext cx="381305" cy="381305"/>
           </a:xfrm>
           <a:prstGeom prst="rect">
             <a:avLst/>
@@ -22195,7 +22195,7 @@
               <a:buNone/>
             </a:pPr>
             <a:r>
-              <a:rPr lang="en-US" sz="1400" b="1" dirty="0">
+              <a:rPr lang="en-US" sz="1330" b="1" dirty="0">
                 <a:solidFill>
                   <a:srgbClr val="FFFFFF"/>
                 </a:solidFill>
@@ -22205,7 +22205,7 @@
               </a:rPr>
               <a:t>A</a:t>
             </a:r>
-            <a:endParaRPr lang="en-US" sz="1400" dirty="0"/>
+            <a:endParaRPr lang="en-US" sz="1330" dirty="0"/>
           </a:p>
         </p:txBody>
       </p:sp>
@@ -22217,8 +22217,8 @@
         </p:nvSpPr>
         <p:spPr>
           <a:xfrm>
-            <a:off x="1097280" y="2627376"/>
-            <a:ext cx="5760720" cy="762000"/>
+            <a:off x="1097280" y="3058363"/>
+            <a:ext cx="5760720" cy="661416"/>
           </a:xfrm>
           <a:prstGeom prst="rect">
             <a:avLst/>
@@ -22234,7 +22234,7 @@
               <a:buNone/>
             </a:pPr>
             <a:r>
-              <a:rPr lang="en-US" sz="2000" dirty="0">
+              <a:rPr lang="en-US" sz="1700" dirty="0">
                 <a:solidFill>
                   <a:srgbClr val="222222"/>
                 </a:solidFill>
@@ -22244,7 +22244,7 @@
               </a:rPr>
               <a:t>只用 front 和 rear 两个指针标记队头和队尾，两个指针均为实指。</a:t>
             </a:r>
-            <a:endParaRPr lang="en-US" sz="2000" dirty="0"/>
+            <a:endParaRPr lang="en-US" sz="1700" dirty="0"/>
           </a:p>
         </p:txBody>
       </p:sp>
@@ -22256,8 +22256,8 @@
         </p:nvSpPr>
         <p:spPr>
           <a:xfrm>
-            <a:off x="548640" y="3706368"/>
-            <a:ext cx="384048" cy="384048"/>
+            <a:off x="548640" y="3968648"/>
+            <a:ext cx="381305" cy="381305"/>
           </a:xfrm>
           <a:prstGeom prst="ellipse">
             <a:avLst/>
@@ -22276,8 +22276,8 @@
         </p:nvSpPr>
         <p:spPr>
           <a:xfrm>
-            <a:off x="548640" y="3706368"/>
-            <a:ext cx="384048" cy="384048"/>
+            <a:off x="548640" y="3968648"/>
+            <a:ext cx="381305" cy="381305"/>
           </a:xfrm>
           <a:prstGeom prst="rect">
             <a:avLst/>
@@ -22293,7 +22293,7 @@
               <a:buNone/>
             </a:pPr>
             <a:r>
-              <a:rPr lang="en-US" sz="1400" b="1" dirty="0">
+              <a:rPr lang="en-US" sz="1330" b="1" dirty="0">
                 <a:solidFill>
                   <a:srgbClr val="FFFFFF"/>
                 </a:solidFill>
@@ -22303,7 +22303,7 @@
               </a:rPr>
               <a:t>B</a:t>
             </a:r>
-            <a:endParaRPr lang="en-US" sz="1400" dirty="0"/>
+            <a:endParaRPr lang="en-US" sz="1330" dirty="0"/>
           </a:p>
         </p:txBody>
       </p:sp>
@@ -22315,8 +22315,8 @@
         </p:nvSpPr>
         <p:spPr>
           <a:xfrm>
-            <a:off x="1097280" y="3517392"/>
-            <a:ext cx="5760720" cy="762000"/>
+            <a:off x="1097280" y="3828593"/>
+            <a:ext cx="5760720" cy="661416"/>
           </a:xfrm>
           <a:prstGeom prst="rect">
             <a:avLst/>
@@ -22332,7 +22332,7 @@
               <a:buNone/>
             </a:pPr>
             <a:r>
-              <a:rPr lang="en-US" sz="2000" dirty="0">
+              <a:rPr lang="en-US" sz="1700" dirty="0">
                 <a:solidFill>
                   <a:srgbClr val="222222"/>
                 </a:solidFill>
@@ -22342,7 +22342,7 @@
               </a:rPr>
               <a:t>用 front、rear 标记队头和队尾，并用整型变量 len 记录元素个数。</a:t>
             </a:r>
-            <a:endParaRPr lang="en-US" sz="2000" dirty="0"/>
+            <a:endParaRPr lang="en-US" sz="1700" dirty="0"/>
           </a:p>
         </p:txBody>
       </p:sp>
@@ -22354,8 +22354,8 @@
         </p:nvSpPr>
         <p:spPr>
           <a:xfrm>
-            <a:off x="548640" y="4596384"/>
-            <a:ext cx="384048" cy="384048"/>
+            <a:off x="548640" y="4738878"/>
+            <a:ext cx="381305" cy="381305"/>
           </a:xfrm>
           <a:prstGeom prst="ellipse">
             <a:avLst/>
@@ -22374,8 +22374,8 @@
         </p:nvSpPr>
         <p:spPr>
           <a:xfrm>
-            <a:off x="548640" y="4596384"/>
-            <a:ext cx="384048" cy="384048"/>
+            <a:off x="548640" y="4738878"/>
+            <a:ext cx="381305" cy="381305"/>
           </a:xfrm>
           <a:prstGeom prst="rect">
             <a:avLst/>
@@ -22391,7 +22391,7 @@
               <a:buNone/>
             </a:pPr>
             <a:r>
-              <a:rPr lang="en-US" sz="1400" b="1" dirty="0">
+              <a:rPr lang="en-US" sz="1330" b="1" dirty="0">
                 <a:solidFill>
                   <a:srgbClr val="FFFFFF"/>
                 </a:solidFill>
@@ -22401,7 +22401,7 @@
               </a:rPr>
               <a:t>C</a:t>
             </a:r>
-            <a:endParaRPr lang="en-US" sz="1400" dirty="0"/>
+            <a:endParaRPr lang="en-US" sz="1330" dirty="0"/>
           </a:p>
         </p:txBody>
       </p:sp>
@@ -22413,8 +22413,8 @@
         </p:nvSpPr>
         <p:spPr>
           <a:xfrm>
-            <a:off x="1097280" y="4407408"/>
-            <a:ext cx="5760720" cy="762000"/>
+            <a:off x="1097280" y="4598822"/>
+            <a:ext cx="5760720" cy="661416"/>
           </a:xfrm>
           <a:prstGeom prst="rect">
             <a:avLst/>
@@ -22430,7 +22430,7 @@
               <a:buNone/>
             </a:pPr>
             <a:r>
-              <a:rPr lang="en-US" sz="2000" dirty="0">
+              <a:rPr lang="en-US" sz="1700" dirty="0">
                 <a:solidFill>
                   <a:srgbClr val="222222"/>
                 </a:solidFill>
@@ -22440,7 +22440,7 @@
               </a:rPr>
               <a:t>用 front、rear 标记队头和队尾，并用布尔变量 empty 记录队列是否为空。</a:t>
             </a:r>
-            <a:endParaRPr lang="en-US" sz="2000" dirty="0"/>
+            <a:endParaRPr lang="en-US" sz="1700" dirty="0"/>
           </a:p>
         </p:txBody>
       </p:sp>
@@ -22452,8 +22452,8 @@
         </p:nvSpPr>
         <p:spPr>
           <a:xfrm>
-            <a:off x="548640" y="5486400"/>
-            <a:ext cx="384048" cy="384048"/>
+            <a:off x="548640" y="5509108"/>
+            <a:ext cx="381305" cy="381305"/>
           </a:xfrm>
           <a:prstGeom prst="ellipse">
             <a:avLst/>
@@ -22472,8 +22472,8 @@
         </p:nvSpPr>
         <p:spPr>
           <a:xfrm>
-            <a:off x="548640" y="5486400"/>
-            <a:ext cx="384048" cy="384048"/>
+            <a:off x="548640" y="5509108"/>
+            <a:ext cx="381305" cy="381305"/>
           </a:xfrm>
           <a:prstGeom prst="rect">
             <a:avLst/>
@@ -22489,7 +22489,7 @@
               <a:buNone/>
             </a:pPr>
             <a:r>
-              <a:rPr lang="en-US" sz="1400" b="1" dirty="0">
+              <a:rPr lang="en-US" sz="1330" b="1" dirty="0">
                 <a:solidFill>
                   <a:srgbClr val="FFFFFF"/>
                 </a:solidFill>
@@ -22499,7 +22499,7 @@
               </a:rPr>
               <a:t>D</a:t>
             </a:r>
-            <a:endParaRPr lang="en-US" sz="1400" dirty="0"/>
+            <a:endParaRPr lang="en-US" sz="1330" dirty="0"/>
           </a:p>
         </p:txBody>
       </p:sp>
@@ -22511,8 +22511,8 @@
         </p:nvSpPr>
         <p:spPr>
           <a:xfrm>
-            <a:off x="1097280" y="5297424"/>
-            <a:ext cx="5760720" cy="762000"/>
+            <a:off x="1097280" y="5369052"/>
+            <a:ext cx="5760720" cy="661416"/>
           </a:xfrm>
           <a:prstGeom prst="rect">
             <a:avLst/>
@@ -22528,7 +22528,7 @@
               <a:buNone/>
             </a:pPr>
             <a:r>
-              <a:rPr lang="en-US" sz="2000" dirty="0">
+              <a:rPr lang="en-US" sz="1700" dirty="0">
                 <a:solidFill>
                   <a:srgbClr val="222222"/>
                 </a:solidFill>
@@ -22538,7 +22538,7 @@
               </a:rPr>
               <a:t>只用 front 和 rear 两个指针标记队头和队尾，两个指针均为虚指。</a:t>
             </a:r>
-            <a:endParaRPr lang="en-US" sz="2000" dirty="0"/>
+            <a:endParaRPr lang="en-US" sz="1700" dirty="0"/>
           </a:p>
         </p:txBody>
       </p:sp>
@@ -22550,12 +22550,12 @@
         </p:nvSpPr>
         <p:spPr>
           <a:xfrm>
-            <a:off x="457200" y="3480816"/>
-            <a:ext cx="6492240" cy="835152"/>
+            <a:off x="457200" y="3792017"/>
+            <a:ext cx="6492240" cy="734568"/>
           </a:xfrm>
           <a:prstGeom prst="roundRect">
             <a:avLst>
-              <a:gd name="adj" fmla="val 10949"/>
+              <a:gd name="adj" fmla="val 12448"/>
             </a:avLst>
           </a:prstGeom>
           <a:noFill/>
@@ -22575,12 +22575,12 @@
         </p:nvSpPr>
         <p:spPr>
           <a:xfrm>
-            <a:off x="457200" y="4370832"/>
-            <a:ext cx="6492240" cy="835152"/>
+            <a:off x="457200" y="4562246"/>
+            <a:ext cx="6492240" cy="734568"/>
           </a:xfrm>
           <a:prstGeom prst="roundRect">
             <a:avLst>
-              <a:gd name="adj" fmla="val 10949"/>
+              <a:gd name="adj" fmla="val 12448"/>
             </a:avLst>
           </a:prstGeom>
           <a:noFill/>
@@ -22744,7 +22744,7 @@
         </p:nvSpPr>
         <p:spPr>
           <a:xfrm>
-            <a:off x="7616952" y="2748534"/>
+            <a:off x="7616952" y="2715006"/>
             <a:ext cx="91440" cy="91440"/>
           </a:xfrm>
           <a:prstGeom prst="ellipse">
@@ -22765,7 +22765,7 @@
         <p:spPr>
           <a:xfrm>
             <a:off x="7818120" y="2651760"/>
-            <a:ext cx="3520440" cy="1479804"/>
+            <a:ext cx="3520440" cy="926592"/>
           </a:xfrm>
           <a:prstGeom prst="rect">
             <a:avLst/>
@@ -22781,7 +22781,7 @@
               <a:buNone/>
             </a:pPr>
             <a:r>
-              <a:rPr lang="en-US" sz="1700" dirty="0">
+              <a:rPr lang="en-US" sz="1300" dirty="0">
                 <a:solidFill>
                   <a:srgbClr val="2B2B2B"/>
                 </a:solidFill>
@@ -22791,7 +22791,7 @@
               </a:rPr>
               <a:t>只有 front、rear 两个下标（模 n）时，二者的相对位置只有 n 种，却要区分长度 0…n 共 n+1 种状态 → 最多存 n−1 个（A、D ✗）。</a:t>
             </a:r>
-            <a:endParaRPr lang="en-US" sz="1700" dirty="0"/>
+            <a:endParaRPr lang="en-US" sz="1300" dirty="0"/>
           </a:p>
         </p:txBody>
       </p:sp>
@@ -22803,7 +22803,7 @@
         </p:nvSpPr>
         <p:spPr>
           <a:xfrm>
-            <a:off x="7616952" y="4368241"/>
+            <a:off x="7616952" y="3748583"/>
             <a:ext cx="91440" cy="91440"/>
           </a:xfrm>
           <a:prstGeom prst="ellipse">
@@ -22823,8 +22823,8 @@
         </p:nvSpPr>
         <p:spPr>
           <a:xfrm>
-            <a:off x="7818120" y="4271467"/>
-            <a:ext cx="3520440" cy="909828"/>
+            <a:off x="7818120" y="3685337"/>
+            <a:ext cx="3520440" cy="926592"/>
           </a:xfrm>
           <a:prstGeom prst="rect">
             <a:avLst/>
@@ -22840,7 +22840,7 @@
               <a:buNone/>
             </a:pPr>
             <a:r>
-              <a:rPr lang="en-US" sz="1700" dirty="0">
+              <a:rPr lang="en-US" sz="1300" dirty="0">
                 <a:solidFill>
                   <a:srgbClr val="2B2B2B"/>
                 </a:solidFill>
@@ -22848,9 +22848,9 @@
                 <a:ea typeface="Microsoft YaHei" pitchFamily="34" charset="-122"/>
                 <a:cs typeface="Microsoft YaHei" pitchFamily="34" charset="-120"/>
               </a:rPr>
-              <a:t>B 用 len、C 用 empty 标志，都能区分「空」与「满」→ 可存满 n 个。</a:t>
-            </a:r>
-            <a:endParaRPr lang="en-US" sz="1700" dirty="0"/>
+              <a:t>虚指（D）：front == rear 表示空，满了也会 front == rear，只好空一格，以 (rear + 1) % n == front 判满；实指（A）同理，只是空、满的判别式整体差一格。</a:t>
+            </a:r>
+            <a:endParaRPr lang="en-US" sz="1300" dirty="0"/>
           </a:p>
         </p:txBody>
       </p:sp>
@@ -22862,7 +22862,7 @@
         </p:nvSpPr>
         <p:spPr>
           <a:xfrm>
-            <a:off x="7616952" y="5417972"/>
+            <a:off x="7616952" y="4782160"/>
             <a:ext cx="91440" cy="91440"/>
           </a:xfrm>
           <a:prstGeom prst="ellipse">
@@ -22882,8 +22882,8 @@
         </p:nvSpPr>
         <p:spPr>
           <a:xfrm>
-            <a:off x="7818120" y="5321198"/>
-            <a:ext cx="3520440" cy="909828"/>
+            <a:off x="7818120" y="4718914"/>
+            <a:ext cx="3520440" cy="490728"/>
           </a:xfrm>
           <a:prstGeom prst="rect">
             <a:avLst/>
@@ -22899,7 +22899,7 @@
               <a:buNone/>
             </a:pPr>
             <a:r>
-              <a:rPr lang="en-US" sz="1700" dirty="0">
+              <a:rPr lang="en-US" sz="1300" dirty="0">
                 <a:solidFill>
                   <a:srgbClr val="2B2B2B"/>
                 </a:solidFill>
@@ -22907,9 +22907,68 @@
                 <a:ea typeface="Microsoft YaHei" pitchFamily="34" charset="-122"/>
                 <a:cs typeface="Microsoft YaHei" pitchFamily="34" charset="-120"/>
               </a:rPr>
-              <a:t>注：题库原答案为 B、D，是把「虚指」理解成一直递增、用时才取模的计数器。</a:t>
-            </a:r>
-            <a:endParaRPr lang="en-US" sz="1700" dirty="0"/>
+              <a:t>B 用 len、C 用 empty 标志，都能区分「空」与「满」→ 可存满 n 个。</a:t>
+            </a:r>
+            <a:endParaRPr lang="en-US" sz="1300" dirty="0"/>
+          </a:p>
+        </p:txBody>
+      </p:sp>
+      <p:sp>
+        <p:nvSpPr>
+          <p:cNvPr id="31" name="ANS_40"/>
+          <p:cNvSpPr/>
+          <p:nvPr/>
+        </p:nvSpPr>
+        <p:spPr>
+          <a:xfrm>
+            <a:off x="7616952" y="5379872"/>
+            <a:ext cx="91440" cy="91440"/>
+          </a:xfrm>
+          <a:prstGeom prst="ellipse">
+            <a:avLst/>
+          </a:prstGeom>
+          <a:solidFill>
+            <a:srgbClr val="F2B134"/>
+          </a:solidFill>
+          <a:ln/>
+        </p:spPr>
+      </p:sp>
+      <p:sp>
+        <p:nvSpPr>
+          <p:cNvPr id="32" name="ANS_41"/>
+          <p:cNvSpPr txBox="1"/>
+          <p:nvPr/>
+        </p:nvSpPr>
+        <p:spPr>
+          <a:xfrm>
+            <a:off x="7818120" y="5316626"/>
+            <a:ext cx="3520440" cy="926592"/>
+          </a:xfrm>
+          <a:prstGeom prst="rect">
+            <a:avLst/>
+          </a:prstGeom>
+          <a:noFill/>
+          <a:ln/>
+        </p:spPr>
+        <p:txBody>
+          <a:bodyPr wrap="square" lIns="0" tIns="0" rIns="0" bIns="0" rtlCol="0" anchor="t"/>
+          <a:lstStyle/>
+          <a:p>
+            <a:pPr algn="l" indent="0" marL="0">
+              <a:buNone/>
+            </a:pPr>
+            <a:r>
+              <a:rPr lang="en-US" sz="1300" dirty="0">
+                <a:solidFill>
+                  <a:srgbClr val="2B2B2B"/>
+                </a:solidFill>
+                <a:latin typeface="Microsoft YaHei" pitchFamily="34" charset="0"/>
+                <a:ea typeface="Microsoft YaHei" pitchFamily="34" charset="-122"/>
+                <a:cs typeface="Microsoft YaHei" pitchFamily="34" charset="-120"/>
+              </a:rPr>
+              <a:t>注：题库原答案为 B、D，是把「虚指」理解成一直递增、用时才取模的计数器（rear − front 即长度）；题干已写明下标对 n 取模，排除这种理解。</a:t>
+            </a:r>
+            <a:endParaRPr lang="en-US" sz="1300" dirty="0"/>
           </a:p>
         </p:txBody>
       </p:sp>
@@ -23352,6 +23411,76 @@
                                         <p:cTn id="40" dur="400"/>
                                         <p:tgtEl>
                                           <p:spTgt spid="30"/>
+                                        </p:tgtEl>
+                                      </p:cBhvr>
+                                    </p:animEffect>
+                                  </p:childTnLst>
+                                </p:cTn>
+                              </p:par>
+                              <p:par>
+                                <p:cTn id="41" presetID="10" presetClass="entr" presetSubtype="0" fill="hold" grpId="0" nodeType="withEffect">
+                                  <p:stCondLst>
+                                    <p:cond delay="0"/>
+                                  </p:stCondLst>
+                                  <p:childTnLst>
+                                    <p:set>
+                                      <p:cBhvr>
+                                        <p:cTn id="42" dur="1" fill="hold">
+                                          <p:stCondLst>
+                                            <p:cond delay="0"/>
+                                          </p:stCondLst>
+                                        </p:cTn>
+                                        <p:tgtEl>
+                                          <p:spTgt spid="31"/>
+                                        </p:tgtEl>
+                                        <p:attrNameLst>
+                                          <p:attrName>style.visibility</p:attrName>
+                                        </p:attrNameLst>
+                                      </p:cBhvr>
+                                      <p:to>
+                                        <p:strVal val="visible"/>
+                                      </p:to>
+                                    </p:set>
+                                    <p:animEffect transition="in" filter="fade">
+                                      <p:cBhvr>
+                                        <p:cTn id="43" dur="400"/>
+                                        <p:tgtEl>
+                                          <p:spTgt spid="31"/>
+                                        </p:tgtEl>
+                                      </p:cBhvr>
+                                    </p:animEffect>
+                                  </p:childTnLst>
+                                </p:cTn>
+                              </p:par>
+                              <p:par>
+                                <p:cTn id="44" presetID="10" presetClass="entr" presetSubtype="0" fill="hold" grpId="0" nodeType="withEffect">
+                                  <p:stCondLst>
+                                    <p:cond delay="0"/>
+                                  </p:stCondLst>
+                                  <p:childTnLst>
+                                    <p:set>
+                                      <p:cBhvr>
+                                        <p:cTn id="45" dur="1" fill="hold">
+                                          <p:stCondLst>
+                                            <p:cond delay="0"/>
+                                          </p:stCondLst>
+                                        </p:cTn>
+                                        <p:tgtEl>
+                                          <p:spTgt spid="32"/>
+                                        </p:tgtEl>
+                                        <p:attrNameLst>
+                                          <p:attrName>style.visibility</p:attrName>
+                                        </p:attrNameLst>
+                                      </p:cBhvr>
+                                      <p:to>
+                                        <p:strVal val="visible"/>
+                                      </p:to>
+                                    </p:set>
+                                    <p:animEffect transition="in" filter="fade">
+                                      <p:cBhvr>
+                                        <p:cTn id="46" dur="400"/>
+                                        <p:tgtEl>
+                                          <p:spTgt spid="32"/>
                                         </p:tgtEl>
                                       </p:cBhvr>
                                     </p:animEffect>
@@ -23398,6 +23527,8 @@
       <p:bldP spid="28" grpId="0" animBg="1"/>
       <p:bldP spid="29" grpId="0" animBg="1"/>
       <p:bldP spid="30" grpId="0" animBg="1"/>
+      <p:bldP spid="31" grpId="0" animBg="1"/>
+      <p:bldP spid="32" grpId="0" animBg="1"/>
     </p:bldLst>
   </p:timing>
 </p:sld>
@@ -23997,7 +24128,7 @@
       </p:sp>
       <p:sp>
         <p:nvSpPr>
-          <p:cNvPr id="19" name="ANS_40"/>
+          <p:cNvPr id="19" name="ANS_42"/>
           <p:cNvSpPr/>
           <p:nvPr/>
         </p:nvSpPr>
@@ -24022,7 +24153,7 @@
       </p:sp>
       <p:sp>
         <p:nvSpPr>
-          <p:cNvPr id="20" name="ANS_41"/>
+          <p:cNvPr id="20" name="ANS_43"/>
           <p:cNvSpPr/>
           <p:nvPr/>
         </p:nvSpPr>
@@ -24047,7 +24178,7 @@
       </p:sp>
       <p:sp>
         <p:nvSpPr>
-          <p:cNvPr id="21" name="ANS_42"/>
+          <p:cNvPr id="21" name="ANS_44"/>
           <p:cNvSpPr/>
           <p:nvPr/>
         </p:nvSpPr>
@@ -24074,7 +24205,7 @@
       </p:sp>
       <p:sp>
         <p:nvSpPr>
-          <p:cNvPr id="22" name="ANS_43"/>
+          <p:cNvPr id="22" name="ANS_45"/>
           <p:cNvSpPr txBox="1"/>
           <p:nvPr/>
         </p:nvSpPr>
@@ -24113,7 +24244,7 @@
       </p:sp>
       <p:sp>
         <p:nvSpPr>
-          <p:cNvPr id="23" name="ANS_44"/>
+          <p:cNvPr id="23" name="ANS_46"/>
           <p:cNvSpPr txBox="1"/>
           <p:nvPr/>
         </p:nvSpPr>
@@ -24152,7 +24283,7 @@
       </p:sp>
       <p:sp>
         <p:nvSpPr>
-          <p:cNvPr id="24" name="ANS_45"/>
+          <p:cNvPr id="24" name="ANS_47"/>
           <p:cNvSpPr txBox="1"/>
           <p:nvPr/>
         </p:nvSpPr>
@@ -24191,7 +24322,7 @@
       </p:sp>
       <p:sp>
         <p:nvSpPr>
-          <p:cNvPr id="25" name="ANS_46"/>
+          <p:cNvPr id="25" name="ANS_48"/>
           <p:cNvSpPr/>
           <p:nvPr/>
         </p:nvSpPr>
@@ -24211,7 +24342,7 @@
       </p:sp>
       <p:sp>
         <p:nvSpPr>
-          <p:cNvPr id="26" name="ANS_47"/>
+          <p:cNvPr id="26" name="ANS_49"/>
           <p:cNvSpPr txBox="1"/>
           <p:nvPr/>
         </p:nvSpPr>
@@ -24250,7 +24381,7 @@
       </p:sp>
       <p:sp>
         <p:nvSpPr>
-          <p:cNvPr id="27" name="ANS_48"/>
+          <p:cNvPr id="27" name="ANS_50"/>
           <p:cNvSpPr/>
           <p:nvPr/>
         </p:nvSpPr>
@@ -24270,7 +24401,7 @@
       </p:sp>
       <p:sp>
         <p:nvSpPr>
-          <p:cNvPr id="28" name="ANS_49"/>
+          <p:cNvPr id="28" name="ANS_51"/>
           <p:cNvSpPr txBox="1"/>
           <p:nvPr/>
         </p:nvSpPr>
@@ -24309,7 +24440,7 @@
       </p:sp>
       <p:sp>
         <p:nvSpPr>
-          <p:cNvPr id="29" name="ANS_50"/>
+          <p:cNvPr id="29" name="ANS_52"/>
           <p:cNvSpPr/>
           <p:nvPr/>
         </p:nvSpPr>
@@ -24329,7 +24460,7 @@
       </p:sp>
       <p:sp>
         <p:nvSpPr>
-          <p:cNvPr id="30" name="ANS_51"/>
+          <p:cNvPr id="30" name="ANS_53"/>
           <p:cNvSpPr txBox="1"/>
           <p:nvPr/>
         </p:nvSpPr>
@@ -25058,7 +25189,7 @@
       </p:sp>
       <p:sp>
         <p:nvSpPr>
-          <p:cNvPr id="7" name="ANS_52"/>
+          <p:cNvPr id="7" name="ANS_54"/>
           <p:cNvSpPr/>
           <p:nvPr/>
         </p:nvSpPr>
@@ -25085,7 +25216,7 @@
       </p:sp>
       <p:sp>
         <p:nvSpPr>
-          <p:cNvPr id="8" name="ANS_53"/>
+          <p:cNvPr id="8" name="ANS_55"/>
           <p:cNvSpPr txBox="1"/>
           <p:nvPr/>
         </p:nvSpPr>
@@ -25124,7 +25255,7 @@
       </p:sp>
       <p:sp>
         <p:nvSpPr>
-          <p:cNvPr id="9" name="ANS_54"/>
+          <p:cNvPr id="9" name="ANS_56"/>
           <p:cNvSpPr txBox="1"/>
           <p:nvPr/>
         </p:nvSpPr>
@@ -25163,7 +25294,7 @@
       </p:sp>
       <p:sp>
         <p:nvSpPr>
-          <p:cNvPr id="10" name="ANS_55"/>
+          <p:cNvPr id="10" name="ANS_57"/>
           <p:cNvSpPr txBox="1"/>
           <p:nvPr/>
         </p:nvSpPr>
@@ -25202,7 +25333,7 @@
       </p:sp>
       <p:sp>
         <p:nvSpPr>
-          <p:cNvPr id="11" name="ANS_56"/>
+          <p:cNvPr id="11" name="ANS_58"/>
           <p:cNvSpPr/>
           <p:nvPr/>
         </p:nvSpPr>
@@ -25222,7 +25353,7 @@
       </p:sp>
       <p:sp>
         <p:nvSpPr>
-          <p:cNvPr id="12" name="ANS_57"/>
+          <p:cNvPr id="12" name="ANS_59"/>
           <p:cNvSpPr txBox="1"/>
           <p:nvPr/>
         </p:nvSpPr>
@@ -25261,7 +25392,7 @@
       </p:sp>
       <p:sp>
         <p:nvSpPr>
-          <p:cNvPr id="13" name="ANS_58"/>
+          <p:cNvPr id="13" name="ANS_60"/>
           <p:cNvSpPr/>
           <p:nvPr/>
         </p:nvSpPr>
@@ -25281,7 +25412,7 @@
       </p:sp>
       <p:sp>
         <p:nvSpPr>
-          <p:cNvPr id="14" name="ANS_59"/>
+          <p:cNvPr id="14" name="ANS_61"/>
           <p:cNvSpPr txBox="1"/>
           <p:nvPr/>
         </p:nvSpPr>
@@ -25342,7 +25473,7 @@
       </p:sp>
       <p:sp>
         <p:nvSpPr>
-          <p:cNvPr id="15" name="ANS_60"/>
+          <p:cNvPr id="15" name="ANS_62"/>
           <p:cNvSpPr/>
           <p:nvPr/>
         </p:nvSpPr>
@@ -25362,7 +25493,7 @@
       </p:sp>
       <p:sp>
         <p:nvSpPr>
-          <p:cNvPr id="16" name="ANS_61"/>
+          <p:cNvPr id="16" name="ANS_63"/>
           <p:cNvSpPr txBox="1"/>
           <p:nvPr/>
         </p:nvSpPr>
@@ -26019,7 +26150,7 @@
       </p:sp>
       <p:sp>
         <p:nvSpPr>
-          <p:cNvPr id="7" name="ANS_62"/>
+          <p:cNvPr id="7" name="ANS_64"/>
           <p:cNvSpPr/>
           <p:nvPr/>
         </p:nvSpPr>
@@ -26046,7 +26177,7 @@
       </p:sp>
       <p:sp>
         <p:nvSpPr>
-          <p:cNvPr id="8" name="ANS_63"/>
+          <p:cNvPr id="8" name="ANS_65"/>
           <p:cNvSpPr txBox="1"/>
           <p:nvPr/>
         </p:nvSpPr>
@@ -26085,7 +26216,7 @@
       </p:sp>
       <p:sp>
         <p:nvSpPr>
-          <p:cNvPr id="9" name="ANS_64"/>
+          <p:cNvPr id="9" name="ANS_66"/>
           <p:cNvSpPr txBox="1"/>
           <p:nvPr/>
         </p:nvSpPr>
@@ -26124,7 +26255,7 @@
       </p:sp>
       <p:sp>
         <p:nvSpPr>
-          <p:cNvPr id="10" name="ANS_65"/>
+          <p:cNvPr id="10" name="ANS_67"/>
           <p:cNvSpPr txBox="1"/>
           <p:nvPr/>
         </p:nvSpPr>
@@ -26163,7 +26294,7 @@
       </p:sp>
       <p:sp>
         <p:nvSpPr>
-          <p:cNvPr id="11" name="ANS_66"/>
+          <p:cNvPr id="11" name="ANS_68"/>
           <p:cNvSpPr/>
           <p:nvPr/>
         </p:nvSpPr>
@@ -26183,7 +26314,7 @@
       </p:sp>
       <p:sp>
         <p:nvSpPr>
-          <p:cNvPr id="12" name="ANS_67"/>
+          <p:cNvPr id="12" name="ANS_69"/>
           <p:cNvSpPr txBox="1"/>
           <p:nvPr/>
         </p:nvSpPr>
@@ -26244,7 +26375,7 @@
       </p:sp>
       <p:sp>
         <p:nvSpPr>
-          <p:cNvPr id="13" name="ANS_68"/>
+          <p:cNvPr id="13" name="ANS_70"/>
           <p:cNvSpPr/>
           <p:nvPr/>
         </p:nvSpPr>
@@ -26264,7 +26395,7 @@
       </p:sp>
       <p:sp>
         <p:nvSpPr>
-          <p:cNvPr id="14" name="ANS_69"/>
+          <p:cNvPr id="14" name="ANS_71"/>
           <p:cNvSpPr txBox="1"/>
           <p:nvPr/>
         </p:nvSpPr>
